--- a/media/module8/slides.pptx
+++ b/media/module8/slides.pptx
@@ -35,6 +35,18 @@
     <p:sldId id="283" r:id="rId35"/>
     <p:sldId id="284" r:id="rId36"/>
     <p:sldId id="285" r:id="rId37"/>
+    <p:sldId id="286" r:id="rId38"/>
+    <p:sldId id="287" r:id="rId39"/>
+    <p:sldId id="288" r:id="rId40"/>
+    <p:sldId id="289" r:id="rId41"/>
+    <p:sldId id="290" r:id="rId42"/>
+    <p:sldId id="291" r:id="rId43"/>
+    <p:sldId id="292" r:id="rId44"/>
+    <p:sldId id="293" r:id="rId45"/>
+    <p:sldId id="294" r:id="rId46"/>
+    <p:sldId id="295" r:id="rId47"/>
+    <p:sldId id="296" r:id="rId48"/>
+    <p:sldId id="297" r:id="rId49"/>
   </p:sldIdLst>
   <p:sldSz cx="12191695" cy="6858000" type="screen4x3"/>
   <p:notesSz cx="6858000" cy="9144000"/>
@@ -601,7 +613,7 @@
           <a:lstStyle/>
           <a:p>
             <a:r>
-              <a:t>Run from course repository root.</a:t>
+              <a:t>From MODULE8 Verification &amp; Testing Methods.</a:t>
             </a:r>
           </a:p>
         </p:txBody>
@@ -671,7 +683,7 @@
           <a:lstStyle/>
           <a:p>
             <a:r>
-              <a:t>module8/examples/examples/i2c_uvm/README.md</a:t>
+              <a:t>From MODULE8 Topics Covered.</a:t>
             </a:r>
           </a:p>
         </p:txBody>
@@ -741,7 +753,7 @@
           <a:lstStyle/>
           <a:p>
             <a:r>
-              <a:t>Hands-on: module8/examples/examples/i2c_uvm/</a:t>
+              <a:t>From MODULE8 Topics Covered.</a:t>
             </a:r>
           </a:p>
         </p:txBody>
@@ -811,7 +823,427 @@
           <a:lstStyle/>
           <a:p>
             <a:r>
-              <a:t>From MODULE8 Learning Outcomes.</a:t>
+              <a:t>Run from course repository root.</a:t>
+            </a:r>
+          </a:p>
+        </p:txBody>
+      </p:sp>
+      <p:sp>
+        <p:nvSpPr>
+          <p:cNvPr id="4" name="Slide Number Placeholder 3"/>
+          <p:cNvSpPr>
+            <a:spLocks noGrp="1"/>
+          </p:cNvSpPr>
+          <p:nvPr>
+            <p:ph type="sldNum" idx="5" sz="quarter"/>
+          </p:nvPr>
+        </p:nvSpPr>
+        <p:spPr/>
+      </p:sp>
+    </p:spTree>
+  </p:cSld>
+  <p:clrMapOvr>
+    <a:masterClrMapping/>
+  </p:clrMapOvr>
+</p:notes>
+</file>
+
+<file path=ppt/notesSlides/notesSlide14.xml><?xml version="1.0" encoding="utf-8"?>
+<p:notes xmlns:a="http://schemas.openxmlformats.org/drawingml/2006/main" xmlns:p="http://schemas.openxmlformats.org/presentationml/2006/main" xmlns:r="http://schemas.openxmlformats.org/officeDocument/2006/relationships">
+  <p:cSld>
+    <p:spTree>
+      <p:nvGrpSpPr>
+        <p:cNvPr id="1" name=""/>
+        <p:cNvGrpSpPr/>
+        <p:nvPr/>
+      </p:nvGrpSpPr>
+      <p:grpSpPr>
+        <a:xfrm>
+          <a:off x="0" y="0"/>
+          <a:ext cx="0" cy="0"/>
+          <a:chOff x="0" y="0"/>
+          <a:chExt cx="0" cy="0"/>
+        </a:xfrm>
+      </p:grpSpPr>
+      <p:sp>
+        <p:nvSpPr>
+          <p:cNvPr id="2" name="Slide Image Placeholder 1"/>
+          <p:cNvSpPr>
+            <a:spLocks noGrp="1"/>
+          </p:cNvSpPr>
+          <p:nvPr>
+            <p:ph type="sldImg" idx="2"/>
+          </p:nvPr>
+        </p:nvSpPr>
+        <p:spPr/>
+      </p:sp>
+      <p:sp>
+        <p:nvSpPr>
+          <p:cNvPr id="3" name="Notes Placeholder 2"/>
+          <p:cNvSpPr>
+            <a:spLocks noGrp="1"/>
+          </p:cNvSpPr>
+          <p:nvPr>
+            <p:ph type="body" idx="3" sz="quarter"/>
+          </p:nvPr>
+        </p:nvSpPr>
+        <p:spPr/>
+        <p:txBody>
+          <a:bodyPr/>
+          <a:lstStyle/>
+          <a:p>
+            <a:r>
+              <a:t>module8/examples/i2c_uvm/README.md</a:t>
+            </a:r>
+          </a:p>
+        </p:txBody>
+      </p:sp>
+      <p:sp>
+        <p:nvSpPr>
+          <p:cNvPr id="4" name="Slide Number Placeholder 3"/>
+          <p:cNvSpPr>
+            <a:spLocks noGrp="1"/>
+          </p:cNvSpPr>
+          <p:nvPr>
+            <p:ph type="sldNum" idx="5" sz="quarter"/>
+          </p:nvPr>
+        </p:nvSpPr>
+        <p:spPr/>
+      </p:sp>
+    </p:spTree>
+  </p:cSld>
+  <p:clrMapOvr>
+    <a:masterClrMapping/>
+  </p:clrMapOvr>
+</p:notes>
+</file>
+
+<file path=ppt/notesSlides/notesSlide15.xml><?xml version="1.0" encoding="utf-8"?>
+<p:notes xmlns:a="http://schemas.openxmlformats.org/drawingml/2006/main" xmlns:p="http://schemas.openxmlformats.org/presentationml/2006/main" xmlns:r="http://schemas.openxmlformats.org/officeDocument/2006/relationships">
+  <p:cSld>
+    <p:spTree>
+      <p:nvGrpSpPr>
+        <p:cNvPr id="1" name=""/>
+        <p:cNvGrpSpPr/>
+        <p:nvPr/>
+      </p:nvGrpSpPr>
+      <p:grpSpPr>
+        <a:xfrm>
+          <a:off x="0" y="0"/>
+          <a:ext cx="0" cy="0"/>
+          <a:chOff x="0" y="0"/>
+          <a:chExt cx="0" cy="0"/>
+        </a:xfrm>
+      </p:grpSpPr>
+      <p:sp>
+        <p:nvSpPr>
+          <p:cNvPr id="2" name="Slide Image Placeholder 1"/>
+          <p:cNvSpPr>
+            <a:spLocks noGrp="1"/>
+          </p:cNvSpPr>
+          <p:nvPr>
+            <p:ph type="sldImg" idx="2"/>
+          </p:nvPr>
+        </p:nvSpPr>
+        <p:spPr/>
+      </p:sp>
+      <p:sp>
+        <p:nvSpPr>
+          <p:cNvPr id="3" name="Notes Placeholder 2"/>
+          <p:cNvSpPr>
+            <a:spLocks noGrp="1"/>
+          </p:cNvSpPr>
+          <p:nvPr>
+            <p:ph type="body" idx="3" sz="quarter"/>
+          </p:nvPr>
+        </p:nvSpPr>
+        <p:spPr/>
+        <p:txBody>
+          <a:bodyPr/>
+          <a:lstStyle/>
+          <a:p>
+            <a:r>
+              <a:t>Hands-on: module8/examples/i2c_uvm/</a:t>
+            </a:r>
+          </a:p>
+        </p:txBody>
+      </p:sp>
+      <p:sp>
+        <p:nvSpPr>
+          <p:cNvPr id="4" name="Slide Number Placeholder 3"/>
+          <p:cNvSpPr>
+            <a:spLocks noGrp="1"/>
+          </p:cNvSpPr>
+          <p:nvPr>
+            <p:ph type="sldNum" idx="5" sz="quarter"/>
+          </p:nvPr>
+        </p:nvSpPr>
+        <p:spPr/>
+      </p:sp>
+    </p:spTree>
+  </p:cSld>
+  <p:clrMapOvr>
+    <a:masterClrMapping/>
+  </p:clrMapOvr>
+</p:notes>
+</file>
+
+<file path=ppt/notesSlides/notesSlide16.xml><?xml version="1.0" encoding="utf-8"?>
+<p:notes xmlns:a="http://schemas.openxmlformats.org/drawingml/2006/main" xmlns:p="http://schemas.openxmlformats.org/presentationml/2006/main" xmlns:r="http://schemas.openxmlformats.org/officeDocument/2006/relationships">
+  <p:cSld>
+    <p:spTree>
+      <p:nvGrpSpPr>
+        <p:cNvPr id="1" name=""/>
+        <p:cNvGrpSpPr/>
+        <p:nvPr/>
+      </p:nvGrpSpPr>
+      <p:grpSpPr>
+        <a:xfrm>
+          <a:off x="0" y="0"/>
+          <a:ext cx="0" cy="0"/>
+          <a:chOff x="0" y="0"/>
+          <a:chExt cx="0" cy="0"/>
+        </a:xfrm>
+      </p:grpSpPr>
+      <p:sp>
+        <p:nvSpPr>
+          <p:cNvPr id="2" name="Slide Image Placeholder 1"/>
+          <p:cNvSpPr>
+            <a:spLocks noGrp="1"/>
+          </p:cNvSpPr>
+          <p:nvPr>
+            <p:ph type="sldImg" idx="2"/>
+          </p:nvPr>
+        </p:nvSpPr>
+        <p:spPr/>
+      </p:sp>
+      <p:sp>
+        <p:nvSpPr>
+          <p:cNvPr id="3" name="Notes Placeholder 2"/>
+          <p:cNvSpPr>
+            <a:spLocks noGrp="1"/>
+          </p:cNvSpPr>
+          <p:nvPr>
+            <p:ph type="body" idx="3" sz="quarter"/>
+          </p:nvPr>
+        </p:nvSpPr>
+        <p:spPr/>
+        <p:txBody>
+          <a:bodyPr/>
+          <a:lstStyle/>
+          <a:p>
+            <a:r>
+              <a:t>From MODULE8 Key Concepts.</a:t>
+            </a:r>
+          </a:p>
+        </p:txBody>
+      </p:sp>
+      <p:sp>
+        <p:nvSpPr>
+          <p:cNvPr id="4" name="Slide Number Placeholder 3"/>
+          <p:cNvSpPr>
+            <a:spLocks noGrp="1"/>
+          </p:cNvSpPr>
+          <p:nvPr>
+            <p:ph type="sldNum" idx="5" sz="quarter"/>
+          </p:nvPr>
+        </p:nvSpPr>
+        <p:spPr/>
+      </p:sp>
+    </p:spTree>
+  </p:cSld>
+  <p:clrMapOvr>
+    <a:masterClrMapping/>
+  </p:clrMapOvr>
+</p:notes>
+</file>
+
+<file path=ppt/notesSlides/notesSlide17.xml><?xml version="1.0" encoding="utf-8"?>
+<p:notes xmlns:a="http://schemas.openxmlformats.org/drawingml/2006/main" xmlns:p="http://schemas.openxmlformats.org/presentationml/2006/main" xmlns:r="http://schemas.openxmlformats.org/officeDocument/2006/relationships">
+  <p:cSld>
+    <p:spTree>
+      <p:nvGrpSpPr>
+        <p:cNvPr id="1" name=""/>
+        <p:cNvGrpSpPr/>
+        <p:nvPr/>
+      </p:nvGrpSpPr>
+      <p:grpSpPr>
+        <a:xfrm>
+          <a:off x="0" y="0"/>
+          <a:ext cx="0" cy="0"/>
+          <a:chOff x="0" y="0"/>
+          <a:chExt cx="0" cy="0"/>
+        </a:xfrm>
+      </p:grpSpPr>
+      <p:sp>
+        <p:nvSpPr>
+          <p:cNvPr id="2" name="Slide Image Placeholder 1"/>
+          <p:cNvSpPr>
+            <a:spLocks noGrp="1"/>
+          </p:cNvSpPr>
+          <p:nvPr>
+            <p:ph type="sldImg" idx="2"/>
+          </p:nvPr>
+        </p:nvSpPr>
+        <p:spPr/>
+      </p:sp>
+      <p:sp>
+        <p:nvSpPr>
+          <p:cNvPr id="3" name="Notes Placeholder 2"/>
+          <p:cNvSpPr>
+            <a:spLocks noGrp="1"/>
+          </p:cNvSpPr>
+          <p:nvPr>
+            <p:ph type="body" idx="3" sz="quarter"/>
+          </p:nvPr>
+        </p:nvSpPr>
+        <p:spPr/>
+        <p:txBody>
+          <a:bodyPr/>
+          <a:lstStyle/>
+          <a:p>
+            <a:r>
+              <a:t>From MODULE8 Key Concepts.</a:t>
+            </a:r>
+          </a:p>
+        </p:txBody>
+      </p:sp>
+      <p:sp>
+        <p:nvSpPr>
+          <p:cNvPr id="4" name="Slide Number Placeholder 3"/>
+          <p:cNvSpPr>
+            <a:spLocks noGrp="1"/>
+          </p:cNvSpPr>
+          <p:nvPr>
+            <p:ph type="sldNum" idx="5" sz="quarter"/>
+          </p:nvPr>
+        </p:nvSpPr>
+        <p:spPr/>
+      </p:sp>
+    </p:spTree>
+  </p:cSld>
+  <p:clrMapOvr>
+    <a:masterClrMapping/>
+  </p:clrMapOvr>
+</p:notes>
+</file>
+
+<file path=ppt/notesSlides/notesSlide18.xml><?xml version="1.0" encoding="utf-8"?>
+<p:notes xmlns:a="http://schemas.openxmlformats.org/drawingml/2006/main" xmlns:p="http://schemas.openxmlformats.org/presentationml/2006/main" xmlns:r="http://schemas.openxmlformats.org/officeDocument/2006/relationships">
+  <p:cSld>
+    <p:spTree>
+      <p:nvGrpSpPr>
+        <p:cNvPr id="1" name=""/>
+        <p:cNvGrpSpPr/>
+        <p:nvPr/>
+      </p:nvGrpSpPr>
+      <p:grpSpPr>
+        <a:xfrm>
+          <a:off x="0" y="0"/>
+          <a:ext cx="0" cy="0"/>
+          <a:chOff x="0" y="0"/>
+          <a:chExt cx="0" cy="0"/>
+        </a:xfrm>
+      </p:grpSpPr>
+      <p:sp>
+        <p:nvSpPr>
+          <p:cNvPr id="2" name="Slide Image Placeholder 1"/>
+          <p:cNvSpPr>
+            <a:spLocks noGrp="1"/>
+          </p:cNvSpPr>
+          <p:nvPr>
+            <p:ph type="sldImg" idx="2"/>
+          </p:nvPr>
+        </p:nvSpPr>
+        <p:spPr/>
+      </p:sp>
+      <p:sp>
+        <p:nvSpPr>
+          <p:cNvPr id="3" name="Notes Placeholder 2"/>
+          <p:cNvSpPr>
+            <a:spLocks noGrp="1"/>
+          </p:cNvSpPr>
+          <p:nvPr>
+            <p:ph type="body" idx="3" sz="quarter"/>
+          </p:nvPr>
+        </p:nvSpPr>
+        <p:spPr/>
+        <p:txBody>
+          <a:bodyPr/>
+          <a:lstStyle/>
+          <a:p>
+            <a:r>
+              <a:t>From MODULE8 Common Pitfalls.</a:t>
+            </a:r>
+          </a:p>
+        </p:txBody>
+      </p:sp>
+      <p:sp>
+        <p:nvSpPr>
+          <p:cNvPr id="4" name="Slide Number Placeholder 3"/>
+          <p:cNvSpPr>
+            <a:spLocks noGrp="1"/>
+          </p:cNvSpPr>
+          <p:nvPr>
+            <p:ph type="sldNum" idx="5" sz="quarter"/>
+          </p:nvPr>
+        </p:nvSpPr>
+        <p:spPr/>
+      </p:sp>
+    </p:spTree>
+  </p:cSld>
+  <p:clrMapOvr>
+    <a:masterClrMapping/>
+  </p:clrMapOvr>
+</p:notes>
+</file>
+
+<file path=ppt/notesSlides/notesSlide19.xml><?xml version="1.0" encoding="utf-8"?>
+<p:notes xmlns:a="http://schemas.openxmlformats.org/drawingml/2006/main" xmlns:p="http://schemas.openxmlformats.org/presentationml/2006/main" xmlns:r="http://schemas.openxmlformats.org/officeDocument/2006/relationships">
+  <p:cSld>
+    <p:spTree>
+      <p:nvGrpSpPr>
+        <p:cNvPr id="1" name=""/>
+        <p:cNvGrpSpPr/>
+        <p:nvPr/>
+      </p:nvGrpSpPr>
+      <p:grpSpPr>
+        <a:xfrm>
+          <a:off x="0" y="0"/>
+          <a:ext cx="0" cy="0"/>
+          <a:chOff x="0" y="0"/>
+          <a:chExt cx="0" cy="0"/>
+        </a:xfrm>
+      </p:grpSpPr>
+      <p:sp>
+        <p:nvSpPr>
+          <p:cNvPr id="2" name="Slide Image Placeholder 1"/>
+          <p:cNvSpPr>
+            <a:spLocks noGrp="1"/>
+          </p:cNvSpPr>
+          <p:nvPr>
+            <p:ph type="sldImg" idx="2"/>
+          </p:nvPr>
+        </p:nvSpPr>
+        <p:spPr/>
+      </p:sp>
+      <p:sp>
+        <p:nvSpPr>
+          <p:cNvPr id="3" name="Notes Placeholder 2"/>
+          <p:cNvSpPr>
+            <a:spLocks noGrp="1"/>
+          </p:cNvSpPr>
+          <p:nvPr>
+            <p:ph type="body" idx="3" sz="quarter"/>
+          </p:nvPr>
+        </p:nvSpPr>
+        <p:spPr/>
+        <p:txBody>
+          <a:bodyPr/>
+          <a:lstStyle/>
+          <a:p>
+            <a:r>
+              <a:t>From MODULE8 Common Pitfalls.</a:t>
             </a:r>
           </a:p>
         </p:txBody>
@@ -906,6 +1338,76 @@
 </p:notes>
 </file>
 
+<file path=ppt/notesSlides/notesSlide20.xml><?xml version="1.0" encoding="utf-8"?>
+<p:notes xmlns:a="http://schemas.openxmlformats.org/drawingml/2006/main" xmlns:p="http://schemas.openxmlformats.org/presentationml/2006/main" xmlns:r="http://schemas.openxmlformats.org/officeDocument/2006/relationships">
+  <p:cSld>
+    <p:spTree>
+      <p:nvGrpSpPr>
+        <p:cNvPr id="1" name=""/>
+        <p:cNvGrpSpPr/>
+        <p:nvPr/>
+      </p:nvGrpSpPr>
+      <p:grpSpPr>
+        <a:xfrm>
+          <a:off x="0" y="0"/>
+          <a:ext cx="0" cy="0"/>
+          <a:chOff x="0" y="0"/>
+          <a:chExt cx="0" cy="0"/>
+        </a:xfrm>
+      </p:grpSpPr>
+      <p:sp>
+        <p:nvSpPr>
+          <p:cNvPr id="2" name="Slide Image Placeholder 1"/>
+          <p:cNvSpPr>
+            <a:spLocks noGrp="1"/>
+          </p:cNvSpPr>
+          <p:nvPr>
+            <p:ph type="sldImg" idx="2"/>
+          </p:nvPr>
+        </p:nvSpPr>
+        <p:spPr/>
+      </p:sp>
+      <p:sp>
+        <p:nvSpPr>
+          <p:cNvPr id="3" name="Notes Placeholder 2"/>
+          <p:cNvSpPr>
+            <a:spLocks noGrp="1"/>
+          </p:cNvSpPr>
+          <p:nvPr>
+            <p:ph type="body" idx="3" sz="quarter"/>
+          </p:nvPr>
+        </p:nvSpPr>
+        <p:spPr/>
+        <p:txBody>
+          <a:bodyPr/>
+          <a:lstStyle/>
+          <a:p>
+            <a:r>
+              <a:t>From MODULE8 Learning Outcomes.</a:t>
+            </a:r>
+          </a:p>
+        </p:txBody>
+      </p:sp>
+      <p:sp>
+        <p:nvSpPr>
+          <p:cNvPr id="4" name="Slide Number Placeholder 3"/>
+          <p:cNvSpPr>
+            <a:spLocks noGrp="1"/>
+          </p:cNvSpPr>
+          <p:nvPr>
+            <p:ph type="sldNum" idx="5" sz="quarter"/>
+          </p:nvPr>
+        </p:nvSpPr>
+        <p:spPr/>
+      </p:sp>
+    </p:spTree>
+  </p:cSld>
+  <p:clrMapOvr>
+    <a:masterClrMapping/>
+  </p:clrMapOvr>
+</p:notes>
+</file>
+
 <file path=ppt/notesSlides/notesSlide3.xml><?xml version="1.0" encoding="utf-8"?>
 <p:notes xmlns:a="http://schemas.openxmlformats.org/drawingml/2006/main" xmlns:p="http://schemas.openxmlformats.org/presentationml/2006/main" xmlns:r="http://schemas.openxmlformats.org/officeDocument/2006/relationships">
   <p:cSld>
@@ -1091,7 +1593,7 @@
           <a:lstStyle/>
           <a:p>
             <a:r>
-              <a:t>From MODULE8 Verification &amp; Testing Methods.</a:t>
+              <a:t>From MODULE8 — execution and artifact layout.</a:t>
             </a:r>
           </a:p>
         </p:txBody>
@@ -1161,7 +1663,7 @@
           <a:lstStyle/>
           <a:p>
             <a:r>
-              <a:t>From MODULE8 Verification &amp; Testing Methods.</a:t>
+              <a:t>Match each path to files under module/examples/.</a:t>
             </a:r>
           </a:p>
         </p:txBody>
@@ -1231,7 +1733,7 @@
           <a:lstStyle/>
           <a:p>
             <a:r>
-              <a:t>From MODULE8 Verification &amp; Testing Methods.</a:t>
+              <a:t>Trace while running module8/EXAMPLES.md labs.</a:t>
             </a:r>
           </a:p>
         </p:txBody>
@@ -1301,7 +1803,7 @@
           <a:lstStyle/>
           <a:p>
             <a:r>
-              <a:t>From MODULE8 Topics Covered.</a:t>
+              <a:t>From MODULE8 Verification &amp; Testing Methods.</a:t>
             </a:r>
           </a:p>
         </p:txBody>
@@ -1371,7 +1873,7 @@
           <a:lstStyle/>
           <a:p>
             <a:r>
-              <a:t>From MODULE8 Topics Covered.</a:t>
+              <a:t>From MODULE8 Verification &amp; Testing Methods.</a:t>
             </a:r>
           </a:p>
         </p:txBody>
@@ -4529,14 +5031,170 @@
               </a:defRPr>
             </a:pPr>
             <a:r>
-              <a:t>Verification environment architecture</a:t>
+              <a:t>2. UVM agent</a:t>
+            </a:r>
+          </a:p>
+        </p:txBody>
+      </p:sp>
+      <p:sp>
+        <p:nvSpPr>
+          <p:cNvPr id="3" name="TextBox 2"/>
+          <p:cNvSpPr txBox="1"/>
+          <p:nvPr/>
+        </p:nvSpPr>
+        <p:spPr>
+          <a:xfrm>
+            <a:off x="548640" y="1234440"/>
+            <a:ext cx="5303520" cy="4754880"/>
+          </a:xfrm>
+          <a:prstGeom prst="rect">
+            <a:avLst/>
+          </a:prstGeom>
+          <a:noFill/>
+        </p:spPr>
+        <p:txBody>
+          <a:bodyPr wrap="square">
+            <a:noAutofit/>
+          </a:bodyPr>
+          <a:lstStyle/>
+          <a:p>
+            <a:pPr>
+              <a:lnSpc>
+                <a:spcPts val="2200"/>
+              </a:lnSpc>
+              <a:spcAft>
+                <a:spcPts val="1000"/>
+              </a:spcAft>
+              <a:defRPr sz="2000" b="0">
+                <a:solidFill>
+                  <a:srgbClr val="333333"/>
+                </a:solidFill>
+                <a:latin typeface="Calibri"/>
+              </a:defRPr>
+            </a:pPr>
+            <a:r>
+              <a:t>• I2cTransaction holds `addr` +</a:t>
+            </a:r>
+          </a:p>
+          <a:p>
+            <a:pPr>
+              <a:lnSpc>
+                <a:spcPts val="2200"/>
+              </a:lnSpc>
+              <a:spcAft>
+                <a:spcPts val="1000"/>
+              </a:spcAft>
+              <a:defRPr sz="2000" b="0">
+                <a:solidFill>
+                  <a:srgbClr val="333333"/>
+                </a:solidFill>
+                <a:latin typeface="Calibri"/>
+              </a:defRPr>
+            </a:pPr>
+            <a:r>
+              <a:t>      `data`; monitor fills</a:t>
+            </a:r>
+          </a:p>
+          <a:p>
+            <a:pPr>
+              <a:lnSpc>
+                <a:spcPts val="2200"/>
+              </a:lnSpc>
+              <a:spcAft>
+                <a:spcPts val="1000"/>
+              </a:spcAft>
+              <a:defRPr sz="2000" b="0">
+                <a:solidFill>
+                  <a:srgbClr val="333333"/>
+                </a:solidFill>
+                <a:latin typeface="Calibri"/>
+              </a:defRPr>
+            </a:pPr>
+            <a:r>
+              <a:t>      `observed_*`.</a:t>
+            </a:r>
+          </a:p>
+          <a:p>
+            <a:pPr>
+              <a:lnSpc>
+                <a:spcPts val="2200"/>
+              </a:lnSpc>
+              <a:spcAft>
+                <a:spcPts val="1000"/>
+              </a:spcAft>
+              <a:defRPr sz="2000" b="0">
+                <a:solidFill>
+                  <a:srgbClr val="333333"/>
+                </a:solidFill>
+                <a:latin typeface="Calibri"/>
+              </a:defRPr>
+            </a:pPr>
+            <a:r>
+              <a:t>• I2cMonitor reimplements baseline</a:t>
+            </a:r>
+          </a:p>
+          <a:p>
+            <a:pPr>
+              <a:lnSpc>
+                <a:spcPts val="2200"/>
+              </a:lnSpc>
+              <a:spcAft>
+                <a:spcPts val="1000"/>
+              </a:spcAft>
+              <a:defRPr sz="2000" b="0">
+                <a:solidFill>
+                  <a:srgbClr val="333333"/>
+                </a:solidFill>
+                <a:latin typeface="Calibri"/>
+              </a:defRPr>
+            </a:pPr>
+            <a:r>
+              <a:t>      bus sampling inside UVM.</a:t>
+            </a:r>
+          </a:p>
+          <a:p>
+            <a:pPr>
+              <a:lnSpc>
+                <a:spcPts val="2200"/>
+              </a:lnSpc>
+              <a:spcAft>
+                <a:spcPts val="1000"/>
+              </a:spcAft>
+              <a:defRPr sz="2000" b="0">
+                <a:solidFill>
+                  <a:srgbClr val="333333"/>
+                </a:solidFill>
+                <a:latin typeface="Calibri"/>
+              </a:defRPr>
+            </a:pPr>
+            <a:r>
+              <a:t>• I2cScoreboard checks address and</a:t>
+            </a:r>
+          </a:p>
+          <a:p>
+            <a:pPr>
+              <a:lnSpc>
+                <a:spcPts val="2200"/>
+              </a:lnSpc>
+              <a:spcAft>
+                <a:spcPts val="1000"/>
+              </a:spcAft>
+              <a:defRPr sz="2000" b="0">
+                <a:solidFill>
+                  <a:srgbClr val="333333"/>
+                </a:solidFill>
+                <a:latin typeface="Calibri"/>
+              </a:defRPr>
+            </a:pPr>
+            <a:r>
+              <a:t>      data phases independently.</a:t>
             </a:r>
           </a:p>
         </p:txBody>
       </p:sp>
       <p:pic>
         <p:nvPicPr>
-          <p:cNvPr id="3" name="Picture 2" descr="verification_architecture.png"/>
+          <p:cNvPr id="4" name="Picture 3" descr="verification_architecture.png"/>
           <p:cNvPicPr>
             <a:picLocks noChangeAspect="1"/>
           </p:cNvPicPr>
@@ -4550,53 +5208,14 @@
         </p:blipFill>
         <p:spPr>
           <a:xfrm>
-            <a:off x="548640" y="1143000"/>
-            <a:ext cx="8128000" cy="4572000"/>
+            <a:off x="6172200" y="2094547"/>
+            <a:ext cx="5394960" cy="3034665"/>
           </a:xfrm>
           <a:prstGeom prst="rect">
             <a:avLst/>
           </a:prstGeom>
         </p:spPr>
       </p:pic>
-      <p:sp>
-        <p:nvSpPr>
-          <p:cNvPr id="4" name="TextBox 3"/>
-          <p:cNvSpPr txBox="1"/>
-          <p:nvPr/>
-        </p:nvSpPr>
-        <p:spPr>
-          <a:xfrm>
-            <a:off x="548640" y="5897880"/>
-            <a:ext cx="11064240" cy="411480"/>
-          </a:xfrm>
-          <a:prstGeom prst="rect">
-            <a:avLst/>
-          </a:prstGeom>
-          <a:noFill/>
-        </p:spPr>
-        <p:txBody>
-          <a:bodyPr wrap="square">
-            <a:noAutofit/>
-          </a:bodyPr>
-          <a:lstStyle/>
-          <a:p>
-            <a:pPr>
-              <a:lnSpc>
-                <a:spcPts val="2200"/>
-              </a:lnSpc>
-              <a:defRPr sz="1200" b="0">
-                <a:solidFill>
-                  <a:srgbClr val="333333"/>
-                </a:solidFill>
-                <a:latin typeface="Calibri"/>
-              </a:defRPr>
-            </a:pPr>
-            <a:r>
-              <a:t>Module 8: UVM layers, agents, and checkers for this phase.</a:t>
-            </a:r>
-          </a:p>
-        </p:txBody>
-      </p:sp>
       <p:sp>
         <p:nvSpPr>
           <p:cNvPr id="5" name="TextBox 4"/>
@@ -4688,7 +5307,7 @@
               </a:defRPr>
             </a:pPr>
             <a:r>
-              <a:t>1. I²C DUT (reused from Module 7)</a:t>
+              <a:t>3. Course capstone</a:t>
             </a:r>
           </a:p>
         </p:txBody>
@@ -4702,7 +5321,7 @@
         <p:spPr>
           <a:xfrm>
             <a:off x="548640" y="1234440"/>
-            <a:ext cx="11064240" cy="4937760"/>
+            <a:ext cx="5303520" cy="4754880"/>
           </a:xfrm>
           <a:prstGeom prst="rect">
             <a:avLst/>
@@ -4730,7 +5349,7 @@
               </a:defRPr>
             </a:pPr>
             <a:r>
-              <a:t>• i2c_master + clk_div; i2c_if for UVM connection.</a:t>
+              <a:t>• Compare UART (async), SPI</a:t>
             </a:r>
           </a:p>
           <a:p>
@@ -4749,14 +5368,76 @@
               </a:defRPr>
             </a:pPr>
             <a:r>
-              <a:t>• Wire sequence: START → address+W → data → STOP.</a:t>
-            </a:r>
-          </a:p>
-        </p:txBody>
-      </p:sp>
-      <p:sp>
-        <p:nvSpPr>
-          <p:cNvPr id="4" name="TextBox 3"/>
+              <a:t>      (SCLK+CS), I²C (shared bus) —</a:t>
+            </a:r>
+          </a:p>
+          <a:p>
+            <a:pPr>
+              <a:lnSpc>
+                <a:spcPts val="2200"/>
+              </a:lnSpc>
+              <a:spcAft>
+                <a:spcPts val="1000"/>
+              </a:spcAft>
+              <a:defRPr sz="2000" b="0">
+                <a:solidFill>
+                  <a:srgbClr val="333333"/>
+                </a:solidFill>
+                <a:latin typeface="Calibri"/>
+              </a:defRPr>
+            </a:pPr>
+            <a:r>
+              <a:t>      same UVM skeleton, different</a:t>
+            </a:r>
+          </a:p>
+          <a:p>
+            <a:pPr>
+              <a:lnSpc>
+                <a:spcPts val="2200"/>
+              </a:lnSpc>
+              <a:spcAft>
+                <a:spcPts val="1000"/>
+              </a:spcAft>
+              <a:defRPr sz="2000" b="0">
+                <a:solidFill>
+                  <a:srgbClr val="333333"/>
+                </a:solidFill>
+                <a:latin typeface="Calibri"/>
+              </a:defRPr>
+            </a:pPr>
+            <a:r>
+              <a:t>      monitors.</a:t>
+            </a:r>
+          </a:p>
+        </p:txBody>
+      </p:sp>
+      <p:pic>
+        <p:nvPicPr>
+          <p:cNvPr id="4" name="Picture 3" descr="testing_methods.png"/>
+          <p:cNvPicPr>
+            <a:picLocks noChangeAspect="1"/>
+          </p:cNvPicPr>
+          <p:nvPr/>
+        </p:nvPicPr>
+        <p:blipFill>
+          <a:blip r:embed="rId2"/>
+          <a:stretch>
+            <a:fillRect/>
+          </a:stretch>
+        </p:blipFill>
+        <p:spPr>
+          <a:xfrm>
+            <a:off x="6172200" y="2094547"/>
+            <a:ext cx="5394960" cy="3034665"/>
+          </a:xfrm>
+          <a:prstGeom prst="rect">
+            <a:avLst/>
+          </a:prstGeom>
+        </p:spPr>
+      </p:pic>
+      <p:sp>
+        <p:nvSpPr>
+          <p:cNvPr id="5" name="TextBox 4"/>
           <p:cNvSpPr txBox="1"/>
           <p:nvPr/>
         </p:nvSpPr>
@@ -4845,21 +5526,45 @@
               </a:defRPr>
             </a:pPr>
             <a:r>
-              <a:t>2. UVM agent</a:t>
-            </a:r>
-          </a:p>
-        </p:txBody>
-      </p:sp>
-      <p:sp>
-        <p:nvSpPr>
-          <p:cNvPr id="3" name="TextBox 2"/>
+              <a:t>RTL block diagram (reference)</a:t>
+            </a:r>
+          </a:p>
+        </p:txBody>
+      </p:sp>
+      <p:pic>
+        <p:nvPicPr>
+          <p:cNvPr id="3" name="Picture 2" descr="rtl_architecture.png"/>
+          <p:cNvPicPr>
+            <a:picLocks noChangeAspect="1"/>
+          </p:cNvPicPr>
+          <p:nvPr/>
+        </p:nvPicPr>
+        <p:blipFill>
+          <a:blip r:embed="rId2"/>
+          <a:stretch>
+            <a:fillRect/>
+          </a:stretch>
+        </p:blipFill>
+        <p:spPr>
+          <a:xfrm>
+            <a:off x="548640" y="1143000"/>
+            <a:ext cx="8128000" cy="4572000"/>
+          </a:xfrm>
+          <a:prstGeom prst="rect">
+            <a:avLst/>
+          </a:prstGeom>
+        </p:spPr>
+      </p:pic>
+      <p:sp>
+        <p:nvSpPr>
+          <p:cNvPr id="4" name="TextBox 3"/>
           <p:cNvSpPr txBox="1"/>
           <p:nvPr/>
         </p:nvSpPr>
         <p:spPr>
           <a:xfrm>
-            <a:off x="548640" y="1234440"/>
-            <a:ext cx="11064240" cy="4937760"/>
+            <a:off x="548640" y="5897880"/>
+            <a:ext cx="11064240" cy="411480"/>
           </a:xfrm>
           <a:prstGeom prst="rect">
             <a:avLst/>
@@ -4876,120 +5581,22 @@
               <a:lnSpc>
                 <a:spcPts val="2200"/>
               </a:lnSpc>
-              <a:spcAft>
-                <a:spcPts val="1000"/>
-              </a:spcAft>
-              <a:defRPr sz="2000" b="0">
-                <a:solidFill>
-                  <a:srgbClr val="333333"/>
-                </a:solidFill>
-                <a:latin typeface="Calibri"/>
-              </a:defRPr>
-            </a:pPr>
-            <a:r>
-              <a:t>• I2cTransaction holds `addr` + `data`; monitor fills</a:t>
-            </a:r>
-          </a:p>
-          <a:p>
-            <a:pPr>
-              <a:lnSpc>
-                <a:spcPts val="2200"/>
-              </a:lnSpc>
-              <a:spcAft>
-                <a:spcPts val="1000"/>
-              </a:spcAft>
-              <a:defRPr sz="2000" b="0">
-                <a:solidFill>
-                  <a:srgbClr val="333333"/>
-                </a:solidFill>
-                <a:latin typeface="Calibri"/>
-              </a:defRPr>
-            </a:pPr>
-            <a:r>
-              <a:t>      `observed_*`.</a:t>
-            </a:r>
-          </a:p>
-          <a:p>
-            <a:pPr>
-              <a:lnSpc>
-                <a:spcPts val="2200"/>
-              </a:lnSpc>
-              <a:spcAft>
-                <a:spcPts val="1000"/>
-              </a:spcAft>
-              <a:defRPr sz="2000" b="0">
-                <a:solidFill>
-                  <a:srgbClr val="333333"/>
-                </a:solidFill>
-                <a:latin typeface="Calibri"/>
-              </a:defRPr>
-            </a:pPr>
-            <a:r>
-              <a:t>• I2cMonitor reimplements baseline bus sampling inside</a:t>
-            </a:r>
-          </a:p>
-          <a:p>
-            <a:pPr>
-              <a:lnSpc>
-                <a:spcPts val="2200"/>
-              </a:lnSpc>
-              <a:spcAft>
-                <a:spcPts val="1000"/>
-              </a:spcAft>
-              <a:defRPr sz="2000" b="0">
-                <a:solidFill>
-                  <a:srgbClr val="333333"/>
-                </a:solidFill>
-                <a:latin typeface="Calibri"/>
-              </a:defRPr>
-            </a:pPr>
-            <a:r>
-              <a:t>      UVM.</a:t>
-            </a:r>
-          </a:p>
-          <a:p>
-            <a:pPr>
-              <a:lnSpc>
-                <a:spcPts val="2200"/>
-              </a:lnSpc>
-              <a:spcAft>
-                <a:spcPts val="1000"/>
-              </a:spcAft>
-              <a:defRPr sz="2000" b="0">
-                <a:solidFill>
-                  <a:srgbClr val="333333"/>
-                </a:solidFill>
-                <a:latin typeface="Calibri"/>
-              </a:defRPr>
-            </a:pPr>
-            <a:r>
-              <a:t>• I2cScoreboard checks address and data phases</a:t>
-            </a:r>
-          </a:p>
-          <a:p>
-            <a:pPr>
-              <a:lnSpc>
-                <a:spcPts val="2200"/>
-              </a:lnSpc>
-              <a:spcAft>
-                <a:spcPts val="1000"/>
-              </a:spcAft>
-              <a:defRPr sz="2000" b="0">
-                <a:solidFill>
-                  <a:srgbClr val="333333"/>
-                </a:solidFill>
-                <a:latin typeface="Calibri"/>
-              </a:defRPr>
-            </a:pPr>
-            <a:r>
-              <a:t>      independently.</a:t>
-            </a:r>
-          </a:p>
-        </p:txBody>
-      </p:sp>
-      <p:sp>
-        <p:nvSpPr>
-          <p:cNvPr id="4" name="TextBox 3"/>
+              <a:defRPr sz="1200" b="0">
+                <a:solidFill>
+                  <a:srgbClr val="333333"/>
+                </a:solidFill>
+                <a:latin typeface="Calibri"/>
+              </a:defRPr>
+            </a:pPr>
+            <a:r>
+              <a:t>Module 8: DUT hierarchy and signal flow.</a:t>
+            </a:r>
+          </a:p>
+        </p:txBody>
+      </p:sp>
+      <p:sp>
+        <p:nvSpPr>
+          <p:cNvPr id="5" name="TextBox 4"/>
           <p:cNvSpPr txBox="1"/>
           <p:nvPr/>
         </p:nvSpPr>
@@ -5078,21 +5685,45 @@
               </a:defRPr>
             </a:pPr>
             <a:r>
-              <a:t>3. Course capstone</a:t>
-            </a:r>
-          </a:p>
-        </p:txBody>
-      </p:sp>
-      <p:sp>
-        <p:nvSpPr>
-          <p:cNvPr id="3" name="TextBox 2"/>
+              <a:t>Verification / testbench diagram (reference)</a:t>
+            </a:r>
+          </a:p>
+        </p:txBody>
+      </p:sp>
+      <p:pic>
+        <p:nvPicPr>
+          <p:cNvPr id="3" name="Picture 2" descr="verification_architecture.png"/>
+          <p:cNvPicPr>
+            <a:picLocks noChangeAspect="1"/>
+          </p:cNvPicPr>
+          <p:nvPr/>
+        </p:nvPicPr>
+        <p:blipFill>
+          <a:blip r:embed="rId2"/>
+          <a:stretch>
+            <a:fillRect/>
+          </a:stretch>
+        </p:blipFill>
+        <p:spPr>
+          <a:xfrm>
+            <a:off x="548640" y="1143000"/>
+            <a:ext cx="8128000" cy="4572000"/>
+          </a:xfrm>
+          <a:prstGeom prst="rect">
+            <a:avLst/>
+          </a:prstGeom>
+        </p:spPr>
+      </p:pic>
+      <p:sp>
+        <p:nvSpPr>
+          <p:cNvPr id="4" name="TextBox 3"/>
           <p:cNvSpPr txBox="1"/>
           <p:nvPr/>
         </p:nvSpPr>
         <p:spPr>
           <a:xfrm>
-            <a:off x="548640" y="1234440"/>
-            <a:ext cx="11064240" cy="4937760"/>
+            <a:off x="548640" y="5897880"/>
+            <a:ext cx="11064240" cy="411480"/>
           </a:xfrm>
           <a:prstGeom prst="rect">
             <a:avLst/>
@@ -5109,44 +5740,22 @@
               <a:lnSpc>
                 <a:spcPts val="2200"/>
               </a:lnSpc>
-              <a:spcAft>
-                <a:spcPts val="1000"/>
-              </a:spcAft>
-              <a:defRPr sz="2000" b="0">
-                <a:solidFill>
-                  <a:srgbClr val="333333"/>
-                </a:solidFill>
-                <a:latin typeface="Calibri"/>
-              </a:defRPr>
-            </a:pPr>
-            <a:r>
-              <a:t>• Compare UART (async), SPI (SCLK+CS), I²C (shared</a:t>
-            </a:r>
-          </a:p>
-          <a:p>
-            <a:pPr>
-              <a:lnSpc>
-                <a:spcPts val="2200"/>
-              </a:lnSpc>
-              <a:spcAft>
-                <a:spcPts val="1000"/>
-              </a:spcAft>
-              <a:defRPr sz="2000" b="0">
-                <a:solidFill>
-                  <a:srgbClr val="333333"/>
-                </a:solidFill>
-                <a:latin typeface="Calibri"/>
-              </a:defRPr>
-            </a:pPr>
-            <a:r>
-              <a:t>      bus) — same UVM skeleton, different monitors.</a:t>
-            </a:r>
-          </a:p>
-        </p:txBody>
-      </p:sp>
-      <p:sp>
-        <p:nvSpPr>
-          <p:cNvPr id="4" name="TextBox 3"/>
+              <a:defRPr sz="1200" b="0">
+                <a:solidFill>
+                  <a:srgbClr val="333333"/>
+                </a:solidFill>
+                <a:latin typeface="Calibri"/>
+              </a:defRPr>
+            </a:pPr>
+            <a:r>
+              <a:t>Module 8: stimulus, observation, and checking.</a:t>
+            </a:r>
+          </a:p>
+        </p:txBody>
+      </p:sp>
+      <p:sp>
+        <p:nvSpPr>
+          <p:cNvPr id="5" name="TextBox 4"/>
           <p:cNvSpPr txBox="1"/>
           <p:nvPr/>
         </p:nvSpPr>
@@ -5209,8 +5818,8 @@
         </p:nvSpPr>
         <p:spPr>
           <a:xfrm>
-            <a:off x="548640" y="2743200"/>
-            <a:ext cx="11064240" cy="1371600"/>
+            <a:off x="548640" y="411480"/>
+            <a:ext cx="11064240" cy="777240"/>
           </a:xfrm>
           <a:prstGeom prst="rect">
             <a:avLst/>
@@ -5223,11 +5832,11 @@
           </a:bodyPr>
           <a:lstStyle/>
           <a:p>
-            <a:pPr algn="ctr">
-              <a:lnSpc>
-                <a:spcPts val="2200"/>
-              </a:lnSpc>
-              <a:defRPr sz="3600" b="1">
+            <a:pPr>
+              <a:lnSpc>
+                <a:spcPts val="2200"/>
+              </a:lnSpc>
+              <a:defRPr sz="2800" b="1">
                 <a:solidFill>
                   <a:srgbClr val="1A1A2E"/>
                 </a:solidFill>
@@ -5235,7 +5844,7 @@
               </a:defRPr>
             </a:pPr>
             <a:r>
-              <a:t>Verification &amp; testing methods</a:t>
+              <a:t>I2cTransaction &amp; agent</a:t>
             </a:r>
           </a:p>
         </p:txBody>
@@ -5243,6 +5852,364 @@
       <p:sp>
         <p:nvSpPr>
           <p:cNvPr id="3" name="TextBox 2"/>
+          <p:cNvSpPr txBox="1"/>
+          <p:nvPr/>
+        </p:nvSpPr>
+        <p:spPr>
+          <a:xfrm>
+            <a:off x="548640" y="1143000"/>
+            <a:ext cx="11064240" cy="5029200"/>
+          </a:xfrm>
+          <a:prstGeom prst="rect">
+            <a:avLst/>
+          </a:prstGeom>
+          <a:solidFill>
+            <a:srgbClr val="F4F4F4"/>
+          </a:solidFill>
+        </p:spPr>
+        <p:txBody>
+          <a:bodyPr wrap="square">
+            <a:noAutofit/>
+          </a:bodyPr>
+          <a:lstStyle/>
+          <a:p>
+            <a:pPr>
+              <a:lnSpc>
+                <a:spcPts val="2200"/>
+              </a:lnSpc>
+              <a:spcAft>
+                <a:spcPts val="400"/>
+              </a:spcAft>
+              <a:defRPr sz="2000" b="0">
+                <a:solidFill>
+                  <a:srgbClr val="333333"/>
+                </a:solidFill>
+                <a:latin typeface="Consolas"/>
+              </a:defRPr>
+            </a:pPr>
+            <a:r>
+              <a:t>/**</a:t>
+            </a:r>
+          </a:p>
+          <a:p>
+            <a:pPr>
+              <a:lnSpc>
+                <a:spcPts val="2200"/>
+              </a:lnSpc>
+              <a:spcAft>
+                <a:spcPts val="400"/>
+              </a:spcAft>
+              <a:defRPr sz="2000" b="0">
+                <a:solidFill>
+                  <a:srgbClr val="333333"/>
+                </a:solidFill>
+                <a:latin typeface="Consolas"/>
+              </a:defRPr>
+            </a:pPr>
+            <a:r>
+              <a:t> * Module 4: I2C master UVM test (simplified, single write transaction).</a:t>
+            </a:r>
+          </a:p>
+          <a:p>
+            <a:pPr>
+              <a:lnSpc>
+                <a:spcPts val="2200"/>
+              </a:lnSpc>
+              <a:spcAft>
+                <a:spcPts val="400"/>
+              </a:spcAft>
+              <a:defRPr sz="2000" b="0">
+                <a:solidFill>
+                  <a:srgbClr val="333333"/>
+                </a:solidFill>
+                <a:latin typeface="Consolas"/>
+              </a:defRPr>
+            </a:pPr>
+            <a:r>
+              <a:t> *</a:t>
+            </a:r>
+          </a:p>
+          <a:p>
+            <a:pPr>
+              <a:lnSpc>
+                <a:spcPts val="2200"/>
+              </a:lnSpc>
+              <a:spcAft>
+                <a:spcPts val="400"/>
+              </a:spcAft>
+              <a:defRPr sz="2000" b="0">
+                <a:solidFill>
+                  <a:srgbClr val="333333"/>
+                </a:solidFill>
+                <a:latin typeface="Consolas"/>
+              </a:defRPr>
+            </a:pPr>
+            <a:r>
+              <a:t> * Teaching example:</a:t>
+            </a:r>
+          </a:p>
+          <a:p>
+            <a:pPr>
+              <a:lnSpc>
+                <a:spcPts val="2200"/>
+              </a:lnSpc>
+              <a:spcAft>
+                <a:spcPts val="400"/>
+              </a:spcAft>
+              <a:defRPr sz="2000" b="0">
+                <a:solidFill>
+                  <a:srgbClr val="333333"/>
+                </a:solidFill>
+                <a:latin typeface="Consolas"/>
+              </a:defRPr>
+            </a:pPr>
+            <a:r>
+              <a:t> * - Simplified I2C master (no real open-drain or ACK handling).</a:t>
+            </a:r>
+          </a:p>
+          <a:p>
+            <a:pPr>
+              <a:lnSpc>
+                <a:spcPts val="2200"/>
+              </a:lnSpc>
+              <a:spcAft>
+                <a:spcPts val="400"/>
+              </a:spcAft>
+              <a:defRPr sz="2000" b="0">
+                <a:solidFill>
+                  <a:srgbClr val="333333"/>
+                </a:solidFill>
+                <a:latin typeface="Consolas"/>
+              </a:defRPr>
+            </a:pPr>
+            <a:r>
+              <a:t> * - UVM agent requests address+data writes and a monitor reconstructs</a:t>
+            </a:r>
+          </a:p>
+          <a:p>
+            <a:pPr>
+              <a:lnSpc>
+                <a:spcPts val="2200"/>
+              </a:lnSpc>
+              <a:spcAft>
+                <a:spcPts val="400"/>
+              </a:spcAft>
+              <a:defRPr sz="2000" b="0">
+                <a:solidFill>
+                  <a:srgbClr val="333333"/>
+                </a:solidFill>
+                <a:latin typeface="Consolas"/>
+              </a:defRPr>
+            </a:pPr>
+            <a:r>
+              <a:t>them</a:t>
+            </a:r>
+          </a:p>
+          <a:p>
+            <a:pPr>
+              <a:lnSpc>
+                <a:spcPts val="2200"/>
+              </a:lnSpc>
+              <a:spcAft>
+                <a:spcPts val="400"/>
+              </a:spcAft>
+              <a:defRPr sz="2000" b="0">
+                <a:solidFill>
+                  <a:srgbClr val="333333"/>
+                </a:solidFill>
+                <a:latin typeface="Consolas"/>
+              </a:defRPr>
+            </a:pPr>
+            <a:r>
+              <a:t> *   from SDA/SCL activity under a single START/STOP frame.</a:t>
+            </a:r>
+          </a:p>
+          <a:p>
+            <a:pPr>
+              <a:lnSpc>
+                <a:spcPts val="2200"/>
+              </a:lnSpc>
+              <a:spcAft>
+                <a:spcPts val="400"/>
+              </a:spcAft>
+              <a:defRPr sz="2000" b="0">
+                <a:solidFill>
+                  <a:srgbClr val="333333"/>
+                </a:solidFill>
+                <a:latin typeface="Consolas"/>
+              </a:defRPr>
+            </a:pPr>
+            <a:r>
+              <a:t> */</a:t>
+            </a:r>
+          </a:p>
+          <a:p>
+            <a:pPr>
+              <a:lnSpc>
+                <a:spcPts val="2200"/>
+              </a:lnSpc>
+              <a:spcAft>
+                <a:spcPts val="400"/>
+              </a:spcAft>
+              <a:defRPr sz="2000" b="0">
+                <a:solidFill>
+                  <a:srgbClr val="333333"/>
+                </a:solidFill>
+                <a:latin typeface="Consolas"/>
+              </a:defRPr>
+            </a:pPr>
+          </a:p>
+          <a:p>
+            <a:pPr>
+              <a:lnSpc>
+                <a:spcPts val="2200"/>
+              </a:lnSpc>
+              <a:spcAft>
+                <a:spcPts val="400"/>
+              </a:spcAft>
+              <a:defRPr sz="2000" b="0">
+                <a:solidFill>
+                  <a:srgbClr val="333333"/>
+                </a:solidFill>
+                <a:latin typeface="Consolas"/>
+              </a:defRPr>
+            </a:pPr>
+            <a:r>
+              <a:t>`include "uvm_macros.svh"</a:t>
+            </a:r>
+          </a:p>
+          <a:p>
+            <a:pPr>
+              <a:lnSpc>
+                <a:spcPts val="2200"/>
+              </a:lnSpc>
+              <a:spcAft>
+                <a:spcPts val="400"/>
+              </a:spcAft>
+              <a:defRPr sz="2000" b="0">
+                <a:solidFill>
+                  <a:srgbClr val="333333"/>
+                </a:solidFill>
+                <a:latin typeface="Consolas"/>
+              </a:defRPr>
+            </a:pPr>
+            <a:r>
+              <a:t>import uvm_pkg::*;</a:t>
+            </a:r>
+          </a:p>
+          <a:p>
+            <a:pPr>
+              <a:lnSpc>
+                <a:spcPts val="2200"/>
+              </a:lnSpc>
+              <a:spcAft>
+                <a:spcPts val="400"/>
+              </a:spcAft>
+              <a:defRPr sz="2000" b="0">
+                <a:solidFill>
+                  <a:srgbClr val="333333"/>
+                </a:solidFill>
+                <a:latin typeface="Consolas"/>
+              </a:defRPr>
+            </a:pPr>
+          </a:p>
+          <a:p>
+            <a:pPr>
+              <a:lnSpc>
+                <a:spcPts val="2200"/>
+              </a:lnSpc>
+              <a:spcAft>
+                <a:spcPts val="400"/>
+              </a:spcAft>
+              <a:defRPr sz="2000" b="0">
+                <a:solidFill>
+                  <a:srgbClr val="333333"/>
+                </a:solidFill>
+                <a:latin typeface="Consolas"/>
+              </a:defRPr>
+            </a:pPr>
+            <a:r>
+              <a:t>`timescale 1ns/1ps</a:t>
+            </a:r>
+          </a:p>
+          <a:p>
+            <a:pPr>
+              <a:lnSpc>
+                <a:spcPts val="2200"/>
+              </a:lnSpc>
+              <a:spcAft>
+                <a:spcPts val="400"/>
+              </a:spcAft>
+              <a:defRPr sz="2000" b="0">
+                <a:solidFill>
+                  <a:srgbClr val="333333"/>
+                </a:solidFill>
+                <a:latin typeface="Consolas"/>
+              </a:defRPr>
+            </a:pPr>
+          </a:p>
+          <a:p>
+            <a:pPr>
+              <a:lnSpc>
+                <a:spcPts val="2200"/>
+              </a:lnSpc>
+              <a:spcAft>
+                <a:spcPts val="400"/>
+              </a:spcAft>
+              <a:defRPr sz="2000" b="0">
+                <a:solidFill>
+                  <a:srgbClr val="333333"/>
+                </a:solidFill>
+                <a:latin typeface="Consolas"/>
+              </a:defRPr>
+            </a:pPr>
+            <a:r>
+              <a:t>// ---------------------------------------------------------------------</a:t>
+            </a:r>
+          </a:p>
+          <a:p>
+            <a:pPr>
+              <a:lnSpc>
+                <a:spcPts val="2200"/>
+              </a:lnSpc>
+              <a:spcAft>
+                <a:spcPts val="400"/>
+              </a:spcAft>
+              <a:defRPr sz="2000" b="0">
+                <a:solidFill>
+                  <a:srgbClr val="333333"/>
+                </a:solidFill>
+                <a:latin typeface="Consolas"/>
+              </a:defRPr>
+            </a:pPr>
+            <a:r>
+              <a:t>--------</a:t>
+            </a:r>
+          </a:p>
+          <a:p>
+            <a:pPr>
+              <a:lnSpc>
+                <a:spcPts val="2200"/>
+              </a:lnSpc>
+              <a:spcAft>
+                <a:spcPts val="400"/>
+              </a:spcAft>
+              <a:defRPr sz="2000" b="0">
+                <a:solidFill>
+                  <a:srgbClr val="333333"/>
+                </a:solidFill>
+                <a:latin typeface="Consolas"/>
+              </a:defRPr>
+            </a:pPr>
+            <a:r>
+              <a:t>// Interface</a:t>
+            </a:r>
+          </a:p>
+        </p:txBody>
+      </p:sp>
+      <p:sp>
+        <p:nvSpPr>
+          <p:cNvPr id="4" name="TextBox 3"/>
           <p:cNvSpPr txBox="1"/>
           <p:nvPr/>
         </p:nvSpPr>
@@ -5305,8 +6272,8 @@
         </p:nvSpPr>
         <p:spPr>
           <a:xfrm>
-            <a:off x="548640" y="411480"/>
-            <a:ext cx="11064240" cy="777240"/>
+            <a:off x="548640" y="2743200"/>
+            <a:ext cx="11064240" cy="1371600"/>
           </a:xfrm>
           <a:prstGeom prst="rect">
             <a:avLst/>
@@ -5319,11 +6286,11 @@
           </a:bodyPr>
           <a:lstStyle/>
           <a:p>
-            <a:pPr>
-              <a:lnSpc>
-                <a:spcPts val="2200"/>
-              </a:lnSpc>
-              <a:defRPr sz="2800" b="1">
+            <a:pPr algn="ctr">
+              <a:lnSpc>
+                <a:spcPts val="2200"/>
+              </a:lnSpc>
+              <a:defRPr sz="3600" b="1">
                 <a:solidFill>
                   <a:srgbClr val="1A1A2E"/>
                 </a:solidFill>
@@ -5331,77 +6298,14 @@
               </a:defRPr>
             </a:pPr>
             <a:r>
-              <a:t>Testing and closure flow</a:t>
-            </a:r>
-          </a:p>
-        </p:txBody>
-      </p:sp>
-      <p:pic>
-        <p:nvPicPr>
-          <p:cNvPr id="3" name="Picture 2" descr="testing_methods.png"/>
-          <p:cNvPicPr>
-            <a:picLocks noChangeAspect="1"/>
-          </p:cNvPicPr>
-          <p:nvPr/>
-        </p:nvPicPr>
-        <p:blipFill>
-          <a:blip r:embed="rId2"/>
-          <a:stretch>
-            <a:fillRect/>
-          </a:stretch>
-        </p:blipFill>
-        <p:spPr>
-          <a:xfrm>
-            <a:off x="548640" y="1143000"/>
-            <a:ext cx="8128000" cy="4572000"/>
-          </a:xfrm>
-          <a:prstGeom prst="rect">
-            <a:avLst/>
-          </a:prstGeom>
-        </p:spPr>
-      </p:pic>
-      <p:sp>
-        <p:nvSpPr>
-          <p:cNvPr id="4" name="TextBox 3"/>
-          <p:cNvSpPr txBox="1"/>
-          <p:nvPr/>
-        </p:nvSpPr>
-        <p:spPr>
-          <a:xfrm>
-            <a:off x="548640" y="5897880"/>
-            <a:ext cx="11064240" cy="411480"/>
-          </a:xfrm>
-          <a:prstGeom prst="rect">
-            <a:avLst/>
-          </a:prstGeom>
-          <a:noFill/>
-        </p:spPr>
-        <p:txBody>
-          <a:bodyPr wrap="square">
-            <a:noAutofit/>
-          </a:bodyPr>
-          <a:lstStyle/>
-          <a:p>
-            <a:pPr>
-              <a:lnSpc>
-                <a:spcPts val="2200"/>
-              </a:lnSpc>
-              <a:defRPr sz="1200" b="0">
-                <a:solidFill>
-                  <a:srgbClr val="333333"/>
-                </a:solidFill>
-                <a:latin typeface="Calibri"/>
-              </a:defRPr>
-            </a:pPr>
-            <a:r>
-              <a:t>Module 8: how tests, checks, and metrics close verification goals.</a:t>
-            </a:r>
-          </a:p>
-        </p:txBody>
-      </p:sp>
-      <p:sp>
-        <p:nvSpPr>
-          <p:cNvPr id="5" name="TextBox 4"/>
+              <a:t>Execution &amp; simulation flow</a:t>
+            </a:r>
+          </a:p>
+        </p:txBody>
+      </p:sp>
+      <p:sp>
+        <p:nvSpPr>
+          <p:cNvPr id="3" name="TextBox 2"/>
           <p:cNvSpPr txBox="1"/>
           <p:nvPr/>
         </p:nvSpPr>
@@ -5490,7 +6394,7 @@
               </a:defRPr>
             </a:pPr>
             <a:r>
-              <a:t>1. Two-phase scoreboard</a:t>
+              <a:t>How the example runs (toolchain)</a:t>
             </a:r>
           </a:p>
         </p:txBody>
@@ -5532,7 +6436,7 @@
               </a:defRPr>
             </a:pPr>
             <a:r>
-              <a:t>• Separate checks for address+W byte and data byte —</a:t>
+              <a:t>• Makefile: Verilator + UVM_HOME compile RTL,</a:t>
             </a:r>
           </a:p>
           <a:p>
@@ -5551,7 +6455,159 @@
               </a:defRPr>
             </a:pPr>
             <a:r>
-              <a:t>      catches shifted or merged fields.</a:t>
+              <a:t>      interface, and test_*.sv</a:t>
+            </a:r>
+          </a:p>
+          <a:p>
+            <a:pPr>
+              <a:lnSpc>
+                <a:spcPts val="2200"/>
+              </a:lnSpc>
+              <a:spcAft>
+                <a:spcPts val="1000"/>
+              </a:spcAft>
+              <a:defRPr sz="2000" b="0">
+                <a:solidFill>
+                  <a:srgbClr val="333333"/>
+                </a:solidFill>
+                <a:latin typeface="Calibri"/>
+              </a:defRPr>
+            </a:pPr>
+            <a:r>
+              <a:t>• UVM phases: build → connect → run_test → report</a:t>
+            </a:r>
+          </a:p>
+          <a:p>
+            <a:pPr>
+              <a:lnSpc>
+                <a:spcPts val="2200"/>
+              </a:lnSpc>
+              <a:spcAft>
+                <a:spcPts val="1000"/>
+              </a:spcAft>
+              <a:defRPr sz="2000" b="0">
+                <a:solidFill>
+                  <a:srgbClr val="333333"/>
+                </a:solidFill>
+                <a:latin typeface="Calibri"/>
+              </a:defRPr>
+            </a:pPr>
+            <a:r>
+              <a:t>      (same pattern as Module 2)</a:t>
+            </a:r>
+          </a:p>
+          <a:p>
+            <a:pPr>
+              <a:lnSpc>
+                <a:spcPts val="2200"/>
+              </a:lnSpc>
+              <a:spcAft>
+                <a:spcPts val="1000"/>
+              </a:spcAft>
+              <a:defRPr sz="2000" b="0">
+                <a:solidFill>
+                  <a:srgbClr val="333333"/>
+                </a:solidFill>
+                <a:latin typeface="Calibri"/>
+              </a:defRPr>
+            </a:pPr>
+            <a:r>
+              <a:t>• Sequence → driver → DUT → monitor → scoreboard (read</a:t>
+            </a:r>
+          </a:p>
+          <a:p>
+            <a:pPr>
+              <a:lnSpc>
+                <a:spcPts val="2200"/>
+              </a:lnSpc>
+              <a:spcAft>
+                <a:spcPts val="1000"/>
+              </a:spcAft>
+              <a:defRPr sz="2000" b="0">
+                <a:solidFill>
+                  <a:srgbClr val="333333"/>
+                </a:solidFill>
+                <a:latin typeface="Calibri"/>
+              </a:defRPr>
+            </a:pPr>
+            <a:r>
+              <a:t>      SCOREBOARD at end)</a:t>
+            </a:r>
+          </a:p>
+          <a:p>
+            <a:pPr>
+              <a:lnSpc>
+                <a:spcPts val="2200"/>
+              </a:lnSpc>
+              <a:spcAft>
+                <a:spcPts val="1000"/>
+              </a:spcAft>
+              <a:defRPr sz="2000" b="0">
+                <a:solidFill>
+                  <a:srgbClr val="333333"/>
+                </a:solidFill>
+                <a:latin typeface="Calibri"/>
+              </a:defRPr>
+            </a:pPr>
+            <a:r>
+              <a:t>• Typical command: make SIM=verilator TEST=test_* (see</a:t>
+            </a:r>
+          </a:p>
+          <a:p>
+            <a:pPr>
+              <a:lnSpc>
+                <a:spcPts val="2200"/>
+              </a:lnSpc>
+              <a:spcAft>
+                <a:spcPts val="1000"/>
+              </a:spcAft>
+              <a:defRPr sz="2000" b="0">
+                <a:solidFill>
+                  <a:srgbClr val="333333"/>
+                </a:solidFill>
+                <a:latin typeface="Calibri"/>
+              </a:defRPr>
+            </a:pPr>
+            <a:r>
+              <a:t>      module8 demo slide)</a:t>
+            </a:r>
+          </a:p>
+          <a:p>
+            <a:pPr>
+              <a:lnSpc>
+                <a:spcPts val="2200"/>
+              </a:lnSpc>
+              <a:spcAft>
+                <a:spcPts val="1000"/>
+              </a:spcAft>
+              <a:defRPr sz="2000" b="0">
+                <a:solidFill>
+                  <a:srgbClr val="333333"/>
+                </a:solidFill>
+                <a:latin typeface="Calibri"/>
+              </a:defRPr>
+            </a:pPr>
+            <a:r>
+              <a:t>• Loopback / hooks connect monitor observations to</a:t>
+            </a:r>
+          </a:p>
+          <a:p>
+            <a:pPr>
+              <a:lnSpc>
+                <a:spcPts val="2200"/>
+              </a:lnSpc>
+              <a:spcAft>
+                <a:spcPts val="1000"/>
+              </a:spcAft>
+              <a:defRPr sz="2000" b="0">
+                <a:solidFill>
+                  <a:srgbClr val="333333"/>
+                </a:solidFill>
+                <a:latin typeface="Calibri"/>
+              </a:defRPr>
+            </a:pPr>
+            <a:r>
+              <a:t>      scoreboard checks</a:t>
             </a:r>
           </a:p>
         </p:txBody>
@@ -5647,7 +6703,7 @@
               </a:defRPr>
             </a:pPr>
             <a:r>
-              <a:t>2. Reuse baseline monitor logic</a:t>
+              <a:t>Example directory layout</a:t>
             </a:r>
           </a:p>
         </p:txBody>
@@ -5689,7 +6745,7 @@
               </a:defRPr>
             </a:pPr>
             <a:r>
-              <a:t>• Module 7 inline monitor → Module 8 I2cMonitor for</a:t>
+              <a:t>• dut/: i2c_master.v, clk_div.v (same as Module 7)</a:t>
             </a:r>
           </a:p>
           <a:p>
@@ -5708,7 +6764,45 @@
               </a:defRPr>
             </a:pPr>
             <a:r>
-              <a:t>      scalable tests.</a:t>
+              <a:t>• test_i2c_uvm.sv: Interface, I2cTransaction,</a:t>
+            </a:r>
+          </a:p>
+          <a:p>
+            <a:pPr>
+              <a:lnSpc>
+                <a:spcPts val="2200"/>
+              </a:lnSpc>
+              <a:spcAft>
+                <a:spcPts val="1000"/>
+              </a:spcAft>
+              <a:defRPr sz="2000" b="0">
+                <a:solidFill>
+                  <a:srgbClr val="333333"/>
+                </a:solidFill>
+                <a:latin typeface="Calibri"/>
+              </a:defRPr>
+            </a:pPr>
+            <a:r>
+              <a:t>      I2cSequence, I2cDriver, I2cMonitor, I2cScoreboard,</a:t>
+            </a:r>
+          </a:p>
+          <a:p>
+            <a:pPr>
+              <a:lnSpc>
+                <a:spcPts val="2200"/>
+              </a:lnSpc>
+              <a:spcAft>
+                <a:spcPts val="1000"/>
+              </a:spcAft>
+              <a:defRPr sz="2000" b="0">
+                <a:solidFill>
+                  <a:srgbClr val="333333"/>
+                </a:solidFill>
+                <a:latin typeface="Calibri"/>
+              </a:defRPr>
+            </a:pPr>
+            <a:r>
+              <a:t>      I2cA…</a:t>
             </a:r>
           </a:p>
         </p:txBody>
@@ -5804,7 +6898,7 @@
               </a:defRPr>
             </a:pPr>
             <a:r>
-              <a:t>3. Extensions</a:t>
+              <a:t>Makefile — UVM I2C sim</a:t>
             </a:r>
           </a:p>
         </p:txBody>
@@ -5817,13 +6911,15 @@
         </p:nvSpPr>
         <p:spPr>
           <a:xfrm>
-            <a:off x="548640" y="1234440"/>
-            <a:ext cx="11064240" cy="4937760"/>
-          </a:xfrm>
-          <a:prstGeom prst="rect">
-            <a:avLst/>
-          </a:prstGeom>
-          <a:noFill/>
+            <a:off x="548640" y="1143000"/>
+            <a:ext cx="11064240" cy="5029200"/>
+          </a:xfrm>
+          <a:prstGeom prst="rect">
+            <a:avLst/>
+          </a:prstGeom>
+          <a:solidFill>
+            <a:srgbClr val="F4F4F4"/>
+          </a:solidFill>
         </p:spPr>
         <p:txBody>
           <a:bodyPr wrap="square">
@@ -5836,36 +6932,331 @@
                 <a:spcPts val="2200"/>
               </a:lnSpc>
               <a:spcAft>
-                <a:spcPts val="1000"/>
-              </a:spcAft>
-              <a:defRPr sz="2000" b="0">
-                <a:solidFill>
-                  <a:srgbClr val="333333"/>
-                </a:solidFill>
-                <a:latin typeface="Calibri"/>
-              </a:defRPr>
-            </a:pPr>
-            <a:r>
-              <a:t>• ACK/NACK, reads, multi-master — [LEARNING_GUIDE §</a:t>
-            </a:r>
-          </a:p>
-          <a:p>
-            <a:pPr>
-              <a:lnSpc>
-                <a:spcPts val="2200"/>
-              </a:lnSpc>
-              <a:spcAft>
-                <a:spcPts val="1000"/>
-              </a:spcAft>
-              <a:defRPr sz="2000" b="0">
-                <a:solidFill>
-                  <a:srgbClr val="333333"/>
-                </a:solidFill>
-                <a:latin typeface="Calibri"/>
-              </a:defRPr>
-            </a:pPr>
-            <a:r>
-              <a:t>      8](LEARNING_GUIDE_PROTOCOLS_AND_UVM.md#8-i2c-uvm-…</a:t>
+                <a:spcPts val="400"/>
+              </a:spcAft>
+              <a:defRPr sz="2000" b="0">
+                <a:solidFill>
+                  <a:srgbClr val="333333"/>
+                </a:solidFill>
+                <a:latin typeface="Consolas"/>
+              </a:defRPr>
+            </a:pPr>
+            <a:r>
+              <a:t># Makefile for Module 8 I2C UVM test</a:t>
+            </a:r>
+          </a:p>
+          <a:p>
+            <a:pPr>
+              <a:lnSpc>
+                <a:spcPts val="2200"/>
+              </a:lnSpc>
+              <a:spcAft>
+                <a:spcPts val="400"/>
+              </a:spcAft>
+              <a:defRPr sz="2000" b="0">
+                <a:solidFill>
+                  <a:srgbClr val="333333"/>
+                </a:solidFill>
+                <a:latin typeface="Consolas"/>
+              </a:defRPr>
+            </a:pPr>
+            <a:r>
+              <a:t>#</a:t>
+            </a:r>
+          </a:p>
+          <a:p>
+            <a:pPr>
+              <a:lnSpc>
+                <a:spcPts val="2200"/>
+              </a:lnSpc>
+              <a:spcAft>
+                <a:spcPts val="400"/>
+              </a:spcAft>
+              <a:defRPr sz="2000" b="0">
+                <a:solidFill>
+                  <a:srgbClr val="333333"/>
+                </a:solidFill>
+                <a:latin typeface="Consolas"/>
+              </a:defRPr>
+            </a:pPr>
+            <a:r>
+              <a:t># Usage:</a:t>
+            </a:r>
+          </a:p>
+          <a:p>
+            <a:pPr>
+              <a:lnSpc>
+                <a:spcPts val="2200"/>
+              </a:lnSpc>
+              <a:spcAft>
+                <a:spcPts val="400"/>
+              </a:spcAft>
+              <a:defRPr sz="2000" b="0">
+                <a:solidFill>
+                  <a:srgbClr val="333333"/>
+                </a:solidFill>
+                <a:latin typeface="Consolas"/>
+              </a:defRPr>
+            </a:pPr>
+            <a:r>
+              <a:t>#   make SIM=verilator TEST=test_i2c_uvm</a:t>
+            </a:r>
+          </a:p>
+          <a:p>
+            <a:pPr>
+              <a:lnSpc>
+                <a:spcPts val="2200"/>
+              </a:lnSpc>
+              <a:spcAft>
+                <a:spcPts val="400"/>
+              </a:spcAft>
+              <a:defRPr sz="2000" b="0">
+                <a:solidFill>
+                  <a:srgbClr val="333333"/>
+                </a:solidFill>
+                <a:latin typeface="Consolas"/>
+              </a:defRPr>
+            </a:pPr>
+            <a:r>
+              <a:t>#</a:t>
+            </a:r>
+          </a:p>
+          <a:p>
+            <a:pPr>
+              <a:lnSpc>
+                <a:spcPts val="2200"/>
+              </a:lnSpc>
+              <a:spcAft>
+                <a:spcPts val="400"/>
+              </a:spcAft>
+              <a:defRPr sz="2000" b="0">
+                <a:solidFill>
+                  <a:srgbClr val="333333"/>
+                </a:solidFill>
+                <a:latin typeface="Consolas"/>
+              </a:defRPr>
+            </a:pPr>
+          </a:p>
+          <a:p>
+            <a:pPr>
+              <a:lnSpc>
+                <a:spcPts val="2200"/>
+              </a:lnSpc>
+              <a:spcAft>
+                <a:spcPts val="400"/>
+              </a:spcAft>
+              <a:defRPr sz="2000" b="0">
+                <a:solidFill>
+                  <a:srgbClr val="333333"/>
+                </a:solidFill>
+                <a:latin typeface="Consolas"/>
+              </a:defRPr>
+            </a:pPr>
+            <a:r>
+              <a:t>SIM ?= verilator</a:t>
+            </a:r>
+          </a:p>
+          <a:p>
+            <a:pPr>
+              <a:lnSpc>
+                <a:spcPts val="2200"/>
+              </a:lnSpc>
+              <a:spcAft>
+                <a:spcPts val="400"/>
+              </a:spcAft>
+              <a:defRPr sz="2000" b="0">
+                <a:solidFill>
+                  <a:srgbClr val="333333"/>
+                </a:solidFill>
+                <a:latin typeface="Consolas"/>
+              </a:defRPr>
+            </a:pPr>
+            <a:r>
+              <a:t>TEST ?= test_i2c_uvm</a:t>
+            </a:r>
+          </a:p>
+          <a:p>
+            <a:pPr>
+              <a:lnSpc>
+                <a:spcPts val="2200"/>
+              </a:lnSpc>
+              <a:spcAft>
+                <a:spcPts val="400"/>
+              </a:spcAft>
+              <a:defRPr sz="2000" b="0">
+                <a:solidFill>
+                  <a:srgbClr val="333333"/>
+                </a:solidFill>
+                <a:latin typeface="Consolas"/>
+              </a:defRPr>
+            </a:pPr>
+          </a:p>
+          <a:p>
+            <a:pPr>
+              <a:lnSpc>
+                <a:spcPts val="2200"/>
+              </a:lnSpc>
+              <a:spcAft>
+                <a:spcPts val="400"/>
+              </a:spcAft>
+              <a:defRPr sz="2000" b="0">
+                <a:solidFill>
+                  <a:srgbClr val="333333"/>
+                </a:solidFill>
+                <a:latin typeface="Consolas"/>
+              </a:defRPr>
+            </a:pPr>
+            <a:r>
+              <a:t># Prefer externally-set UVM_HOME, but fall back to vendored UVM.</a:t>
+            </a:r>
+          </a:p>
+          <a:p>
+            <a:pPr>
+              <a:lnSpc>
+                <a:spcPts val="2200"/>
+              </a:lnSpc>
+              <a:spcAft>
+                <a:spcPts val="400"/>
+              </a:spcAft>
+              <a:defRPr sz="2000" b="0">
+                <a:solidFill>
+                  <a:srgbClr val="333333"/>
+                </a:solidFill>
+                <a:latin typeface="Consolas"/>
+              </a:defRPr>
+            </a:pPr>
+            <a:r>
+              <a:t># From module8/examples/i2c_uvm, repo root is ../../..</a:t>
+            </a:r>
+          </a:p>
+          <a:p>
+            <a:pPr>
+              <a:lnSpc>
+                <a:spcPts val="2200"/>
+              </a:lnSpc>
+              <a:spcAft>
+                <a:spcPts val="400"/>
+              </a:spcAft>
+              <a:defRPr sz="2000" b="0">
+                <a:solidFill>
+                  <a:srgbClr val="333333"/>
+                </a:solidFill>
+                <a:latin typeface="Consolas"/>
+              </a:defRPr>
+            </a:pPr>
+            <a:r>
+              <a:t>UVM_HOME ?= \\$(shell echo \\$UVM_HOME)</a:t>
+            </a:r>
+          </a:p>
+          <a:p>
+            <a:pPr>
+              <a:lnSpc>
+                <a:spcPts val="2200"/>
+              </a:lnSpc>
+              <a:spcAft>
+                <a:spcPts val="400"/>
+              </a:spcAft>
+              <a:defRPr sz="2000" b="0">
+                <a:solidFill>
+                  <a:srgbClr val="333333"/>
+                </a:solidFill>
+                <a:latin typeface="Consolas"/>
+              </a:defRPr>
+            </a:pPr>
+            <a:r>
+              <a:t>UVM_HOME_FALLBACK := ../../../tools/uvm-2017/1800.2-2017-1.0</a:t>
+            </a:r>
+          </a:p>
+          <a:p>
+            <a:pPr>
+              <a:lnSpc>
+                <a:spcPts val="2200"/>
+              </a:lnSpc>
+              <a:spcAft>
+                <a:spcPts val="400"/>
+              </a:spcAft>
+              <a:defRPr sz="2000" b="0">
+                <a:solidFill>
+                  <a:srgbClr val="333333"/>
+                </a:solidFill>
+                <a:latin typeface="Consolas"/>
+              </a:defRPr>
+            </a:pPr>
+            <a:r>
+              <a:t>UVM_HOME_FALLBACK_ALT :=</a:t>
+            </a:r>
+          </a:p>
+          <a:p>
+            <a:pPr>
+              <a:lnSpc>
+                <a:spcPts val="2200"/>
+              </a:lnSpc>
+              <a:spcAft>
+                <a:spcPts val="400"/>
+              </a:spcAft>
+              <a:defRPr sz="2000" b="0">
+                <a:solidFill>
+                  <a:srgbClr val="333333"/>
+                </a:solidFill>
+                <a:latin typeface="Consolas"/>
+              </a:defRPr>
+            </a:pPr>
+            <a:r>
+              <a:t>../../../tools/learn_uvm2017_sv_verilator/tools/uvm-2017/1800.2-2017-1.0</a:t>
+            </a:r>
+          </a:p>
+          <a:p>
+            <a:pPr>
+              <a:lnSpc>
+                <a:spcPts val="2200"/>
+              </a:lnSpc>
+              <a:spcAft>
+                <a:spcPts val="400"/>
+              </a:spcAft>
+              <a:defRPr sz="2000" b="0">
+                <a:solidFill>
+                  <a:srgbClr val="333333"/>
+                </a:solidFill>
+                <a:latin typeface="Consolas"/>
+              </a:defRPr>
+            </a:pPr>
+          </a:p>
+          <a:p>
+            <a:pPr>
+              <a:lnSpc>
+                <a:spcPts val="2200"/>
+              </a:lnSpc>
+              <a:spcAft>
+                <a:spcPts val="400"/>
+              </a:spcAft>
+              <a:defRPr sz="2000" b="0">
+                <a:solidFill>
+                  <a:srgbClr val="333333"/>
+                </a:solidFill>
+                <a:latin typeface="Consolas"/>
+              </a:defRPr>
+            </a:pPr>
+            <a:r>
+              <a:t>ifeq (\\$(UVM_HOME),)</a:t>
+            </a:r>
+          </a:p>
+          <a:p>
+            <a:pPr>
+              <a:lnSpc>
+                <a:spcPts val="2200"/>
+              </a:lnSpc>
+              <a:spcAft>
+                <a:spcPts val="400"/>
+              </a:spcAft>
+              <a:defRPr sz="2000" b="0">
+                <a:solidFill>
+                  <a:srgbClr val="333333"/>
+                </a:solidFill>
+                <a:latin typeface="Consolas"/>
+              </a:defRPr>
+            </a:pPr>
+            <a:r>
+              <a:t># ...</a:t>
             </a:r>
           </a:p>
         </p:txBody>
@@ -5961,7 +7352,7 @@
               </a:defRPr>
             </a:pPr>
             <a:r>
-              <a:t>Syllabus topics</a:t>
+              <a:t>Key files to study</a:t>
             </a:r>
           </a:p>
         </p:txBody>
@@ -6290,7 +7681,7 @@
               </a:defRPr>
             </a:pPr>
             <a:r>
-              <a:t>1. I²C protocol recap</a:t>
+              <a:t>Open these in the repo</a:t>
             </a:r>
           </a:p>
         </p:txBody>
@@ -6332,7 +7723,7 @@
               </a:defRPr>
             </a:pPr>
             <a:r>
-              <a:t>• START/STOP on SCL high; MSB-first address and data</a:t>
+              <a:t>• `module8/examples/i2c_uvm/dut/i2c_master.v` — reused</a:t>
             </a:r>
           </a:p>
           <a:p>
@@ -6351,7 +7742,83 @@
               </a:defRPr>
             </a:pPr>
             <a:r>
-              <a:t>      on SDA.</a:t>
+              <a:t>      from Module 7</a:t>
+            </a:r>
+          </a:p>
+          <a:p>
+            <a:pPr>
+              <a:lnSpc>
+                <a:spcPts val="2200"/>
+              </a:lnSpc>
+              <a:spcAft>
+                <a:spcPts val="1000"/>
+              </a:spcAft>
+              <a:defRPr sz="2000" b="0">
+                <a:solidFill>
+                  <a:srgbClr val="333333"/>
+                </a:solidFill>
+                <a:latin typeface="Calibri"/>
+              </a:defRPr>
+            </a:pPr>
+            <a:r>
+              <a:t>• `module8/examples/i2c_uvm/test_i2c_uvm.sv` —</a:t>
+            </a:r>
+          </a:p>
+          <a:p>
+            <a:pPr>
+              <a:lnSpc>
+                <a:spcPts val="2200"/>
+              </a:lnSpc>
+              <a:spcAft>
+                <a:spcPts val="1000"/>
+              </a:spcAft>
+              <a:defRPr sz="2000" b="0">
+                <a:solidFill>
+                  <a:srgbClr val="333333"/>
+                </a:solidFill>
+                <a:latin typeface="Calibri"/>
+              </a:defRPr>
+            </a:pPr>
+            <a:r>
+              <a:t>      I2cMonitor + two-field scoreboard</a:t>
+            </a:r>
+          </a:p>
+          <a:p>
+            <a:pPr>
+              <a:lnSpc>
+                <a:spcPts val="2200"/>
+              </a:lnSpc>
+              <a:spcAft>
+                <a:spcPts val="1000"/>
+              </a:spcAft>
+              <a:defRPr sz="2000" b="0">
+                <a:solidFill>
+                  <a:srgbClr val="333333"/>
+                </a:solidFill>
+                <a:latin typeface="Calibri"/>
+              </a:defRPr>
+            </a:pPr>
+            <a:r>
+              <a:t>• `docs/LEARNING_GUIDE_PROTOCOLS_AND_UVM.md` — § 8 I²C</a:t>
+            </a:r>
+          </a:p>
+          <a:p>
+            <a:pPr>
+              <a:lnSpc>
+                <a:spcPts val="2200"/>
+              </a:lnSpc>
+              <a:spcAft>
+                <a:spcPts val="1000"/>
+              </a:spcAft>
+              <a:defRPr sz="2000" b="0">
+                <a:solidFill>
+                  <a:srgbClr val="333333"/>
+                </a:solidFill>
+                <a:latin typeface="Calibri"/>
+              </a:defRPr>
+            </a:pPr>
+            <a:r>
+              <a:t>      UVM mapping</a:t>
             </a:r>
           </a:p>
         </p:txBody>
@@ -6421,8 +7888,8 @@
         </p:nvSpPr>
         <p:spPr>
           <a:xfrm>
-            <a:off x="548640" y="411480"/>
-            <a:ext cx="11064240" cy="777240"/>
+            <a:off x="548640" y="2743200"/>
+            <a:ext cx="11064240" cy="1371600"/>
           </a:xfrm>
           <a:prstGeom prst="rect">
             <a:avLst/>
@@ -6435,11 +7902,11 @@
           </a:bodyPr>
           <a:lstStyle/>
           <a:p>
-            <a:pPr>
-              <a:lnSpc>
-                <a:spcPts val="2200"/>
-              </a:lnSpc>
-              <a:defRPr sz="2800" b="1">
+            <a:pPr algn="ctr">
+              <a:lnSpc>
+                <a:spcPts val="2200"/>
+              </a:lnSpc>
+              <a:defRPr sz="3600" b="1">
                 <a:solidFill>
                   <a:srgbClr val="1A1A2E"/>
                 </a:solidFill>
@@ -6447,7 +7914,7 @@
               </a:defRPr>
             </a:pPr>
             <a:r>
-              <a:t>2. Toolchain</a:t>
+              <a:t>Verification &amp; testing methods</a:t>
             </a:r>
           </a:p>
         </p:txBody>
@@ -6455,67 +7922,6 @@
       <p:sp>
         <p:nvSpPr>
           <p:cNvPr id="3" name="TextBox 2"/>
-          <p:cNvSpPr txBox="1"/>
-          <p:nvPr/>
-        </p:nvSpPr>
-        <p:spPr>
-          <a:xfrm>
-            <a:off x="548640" y="1234440"/>
-            <a:ext cx="11064240" cy="4937760"/>
-          </a:xfrm>
-          <a:prstGeom prst="rect">
-            <a:avLst/>
-          </a:prstGeom>
-          <a:noFill/>
-        </p:spPr>
-        <p:txBody>
-          <a:bodyPr wrap="square">
-            <a:noAutofit/>
-          </a:bodyPr>
-          <a:lstStyle/>
-          <a:p>
-            <a:pPr>
-              <a:lnSpc>
-                <a:spcPts val="2200"/>
-              </a:lnSpc>
-              <a:spcAft>
-                <a:spcPts val="1000"/>
-              </a:spcAft>
-              <a:defRPr sz="2000" b="0">
-                <a:solidFill>
-                  <a:srgbClr val="333333"/>
-                </a:solidFill>
-                <a:latin typeface="Calibri"/>
-              </a:defRPr>
-            </a:pPr>
-            <a:r>
-              <a:t>• `make SIM=verilator TEST=test_i2c_uvm`;</a:t>
-            </a:r>
-          </a:p>
-          <a:p>
-            <a:pPr>
-              <a:lnSpc>
-                <a:spcPts val="2200"/>
-              </a:lnSpc>
-              <a:spcAft>
-                <a:spcPts val="1000"/>
-              </a:spcAft>
-              <a:defRPr sz="2000" b="0">
-                <a:solidFill>
-                  <a:srgbClr val="333333"/>
-                </a:solidFill>
-                <a:latin typeface="Calibri"/>
-              </a:defRPr>
-            </a:pPr>
-            <a:r>
-              <a:t>      `+UVM_TESTNAME=test_i2c_uvm`.</a:t>
-            </a:r>
-          </a:p>
-        </p:txBody>
-      </p:sp>
-      <p:sp>
-        <p:nvSpPr>
-          <p:cNvPr id="4" name="TextBox 3"/>
           <p:cNvSpPr txBox="1"/>
           <p:nvPr/>
         </p:nvSpPr>
@@ -6578,8 +7984,8 @@
         </p:nvSpPr>
         <p:spPr>
           <a:xfrm>
-            <a:off x="548640" y="2743200"/>
-            <a:ext cx="11064240" cy="1371600"/>
+            <a:off x="548640" y="411480"/>
+            <a:ext cx="11064240" cy="777240"/>
           </a:xfrm>
           <a:prstGeom prst="rect">
             <a:avLst/>
@@ -6592,11 +7998,11 @@
           </a:bodyPr>
           <a:lstStyle/>
           <a:p>
-            <a:pPr algn="ctr">
-              <a:lnSpc>
-                <a:spcPts val="2200"/>
-              </a:lnSpc>
-              <a:defRPr sz="3600" b="1">
+            <a:pPr>
+              <a:lnSpc>
+                <a:spcPts val="2200"/>
+              </a:lnSpc>
+              <a:defRPr sz="2800" b="1">
                 <a:solidFill>
                   <a:srgbClr val="1A1A2E"/>
                 </a:solidFill>
@@ -6604,7 +8010,7 @@
               </a:defRPr>
             </a:pPr>
             <a:r>
-              <a:t>Hands-on examples</a:t>
+              <a:t>1. Two-phase scoreboard</a:t>
             </a:r>
           </a:p>
         </p:txBody>
@@ -6612,6 +8018,110 @@
       <p:sp>
         <p:nvSpPr>
           <p:cNvPr id="3" name="TextBox 2"/>
+          <p:cNvSpPr txBox="1"/>
+          <p:nvPr/>
+        </p:nvSpPr>
+        <p:spPr>
+          <a:xfrm>
+            <a:off x="548640" y="1234440"/>
+            <a:ext cx="5303520" cy="4754880"/>
+          </a:xfrm>
+          <a:prstGeom prst="rect">
+            <a:avLst/>
+          </a:prstGeom>
+          <a:noFill/>
+        </p:spPr>
+        <p:txBody>
+          <a:bodyPr wrap="square">
+            <a:noAutofit/>
+          </a:bodyPr>
+          <a:lstStyle/>
+          <a:p>
+            <a:pPr>
+              <a:lnSpc>
+                <a:spcPts val="2200"/>
+              </a:lnSpc>
+              <a:spcAft>
+                <a:spcPts val="1000"/>
+              </a:spcAft>
+              <a:defRPr sz="2000" b="0">
+                <a:solidFill>
+                  <a:srgbClr val="333333"/>
+                </a:solidFill>
+                <a:latin typeface="Calibri"/>
+              </a:defRPr>
+            </a:pPr>
+            <a:r>
+              <a:t>• Separate checks for address+W</a:t>
+            </a:r>
+          </a:p>
+          <a:p>
+            <a:pPr>
+              <a:lnSpc>
+                <a:spcPts val="2200"/>
+              </a:lnSpc>
+              <a:spcAft>
+                <a:spcPts val="1000"/>
+              </a:spcAft>
+              <a:defRPr sz="2000" b="0">
+                <a:solidFill>
+                  <a:srgbClr val="333333"/>
+                </a:solidFill>
+                <a:latin typeface="Calibri"/>
+              </a:defRPr>
+            </a:pPr>
+            <a:r>
+              <a:t>      byte and data byte — catches</a:t>
+            </a:r>
+          </a:p>
+          <a:p>
+            <a:pPr>
+              <a:lnSpc>
+                <a:spcPts val="2200"/>
+              </a:lnSpc>
+              <a:spcAft>
+                <a:spcPts val="1000"/>
+              </a:spcAft>
+              <a:defRPr sz="2000" b="0">
+                <a:solidFill>
+                  <a:srgbClr val="333333"/>
+                </a:solidFill>
+                <a:latin typeface="Calibri"/>
+              </a:defRPr>
+            </a:pPr>
+            <a:r>
+              <a:t>      shifted or merged fields.</a:t>
+            </a:r>
+          </a:p>
+        </p:txBody>
+      </p:sp>
+      <p:pic>
+        <p:nvPicPr>
+          <p:cNvPr id="4" name="Picture 3" descr="testing_methods.png"/>
+          <p:cNvPicPr>
+            <a:picLocks noChangeAspect="1"/>
+          </p:cNvPicPr>
+          <p:nvPr/>
+        </p:nvPicPr>
+        <p:blipFill>
+          <a:blip r:embed="rId2"/>
+          <a:stretch>
+            <a:fillRect/>
+          </a:stretch>
+        </p:blipFill>
+        <p:spPr>
+          <a:xfrm>
+            <a:off x="6172200" y="2094547"/>
+            <a:ext cx="5394960" cy="3034665"/>
+          </a:xfrm>
+          <a:prstGeom prst="rect">
+            <a:avLst/>
+          </a:prstGeom>
+        </p:spPr>
+      </p:pic>
+      <p:sp>
+        <p:nvSpPr>
+          <p:cNvPr id="5" name="TextBox 4"/>
           <p:cNvSpPr txBox="1"/>
           <p:nvPr/>
         </p:nvSpPr>
@@ -6700,7 +8210,7 @@
               </a:defRPr>
             </a:pPr>
             <a:r>
-              <a:t>Module 8 self-check</a:t>
+              <a:t>2. Reuse baseline monitor logic</a:t>
             </a:r>
           </a:p>
         </p:txBody>
@@ -6713,15 +8223,13 @@
         </p:nvSpPr>
         <p:spPr>
           <a:xfrm>
-            <a:off x="548640" y="1051560"/>
-            <a:ext cx="11064240" cy="914400"/>
-          </a:xfrm>
-          <a:prstGeom prst="rect">
-            <a:avLst/>
-          </a:prstGeom>
-          <a:solidFill>
-            <a:srgbClr val="F4F4F4"/>
-          </a:solidFill>
+            <a:off x="548640" y="1234440"/>
+            <a:ext cx="5303520" cy="4754880"/>
+          </a:xfrm>
+          <a:prstGeom prst="rect">
+            <a:avLst/>
+          </a:prstGeom>
+          <a:noFill/>
         </p:spPr>
         <p:txBody>
           <a:bodyPr wrap="square">
@@ -6734,24 +8242,43 @@
                 <a:spcPts val="2200"/>
               </a:lnSpc>
               <a:spcAft>
-                <a:spcPts val="200"/>
-              </a:spcAft>
-              <a:defRPr sz="2000" b="0">
-                <a:solidFill>
-                  <a:srgbClr val="333333"/>
-                </a:solidFill>
-                <a:latin typeface="Consolas"/>
-              </a:defRPr>
-            </a:pPr>
-            <a:r>
-              <a:t>$ ./scripts/module8.sh --help</a:t>
+                <a:spcPts val="1000"/>
+              </a:spcAft>
+              <a:defRPr sz="2000" b="0">
+                <a:solidFill>
+                  <a:srgbClr val="333333"/>
+                </a:solidFill>
+                <a:latin typeface="Calibri"/>
+              </a:defRPr>
+            </a:pPr>
+            <a:r>
+              <a:t>• Module 7 inline monitor → Module</a:t>
+            </a:r>
+          </a:p>
+          <a:p>
+            <a:pPr>
+              <a:lnSpc>
+                <a:spcPts val="2200"/>
+              </a:lnSpc>
+              <a:spcAft>
+                <a:spcPts val="1000"/>
+              </a:spcAft>
+              <a:defRPr sz="2000" b="0">
+                <a:solidFill>
+                  <a:srgbClr val="333333"/>
+                </a:solidFill>
+                <a:latin typeface="Calibri"/>
+              </a:defRPr>
+            </a:pPr>
+            <a:r>
+              <a:t>      8 I2cMonitor for scalable tests.</a:t>
             </a:r>
           </a:p>
         </p:txBody>
       </p:sp>
       <p:pic>
         <p:nvPicPr>
-          <p:cNvPr id="4" name="Picture 3" descr="module8_check.png"/>
+          <p:cNvPr id="4" name="Picture 3" descr="testing_methods.png"/>
           <p:cNvPicPr>
             <a:picLocks noChangeAspect="1"/>
           </p:cNvPicPr>
@@ -6765,8 +8292,8 @@
         </p:blipFill>
         <p:spPr>
           <a:xfrm>
-            <a:off x="548640" y="1965960"/>
-            <a:ext cx="7071358" cy="3977639"/>
+            <a:off x="6172200" y="2094547"/>
+            <a:ext cx="5394960" cy="3034665"/>
           </a:xfrm>
           <a:prstGeom prst="rect">
             <a:avLst/>
@@ -6864,7 +8391,7 @@
               </a:defRPr>
             </a:pPr>
             <a:r>
-              <a:t>Example 1: I²C UVM</a:t>
+              <a:t>3. Extensions</a:t>
             </a:r>
           </a:p>
         </p:txBody>
@@ -6878,7 +8405,7 @@
         <p:spPr>
           <a:xfrm>
             <a:off x="548640" y="1234440"/>
-            <a:ext cx="11064240" cy="4937760"/>
+            <a:ext cx="5303520" cy="4754880"/>
           </a:xfrm>
           <a:prstGeom prst="rect">
             <a:avLst/>
@@ -6906,7 +8433,7 @@
               </a:defRPr>
             </a:pPr>
             <a:r>
-              <a:t>• UVM phases and reporting (DRIVER, MONITOR,</a:t>
+              <a:t>• ACK/NACK, reads, multi-master —</a:t>
             </a:r>
           </a:p>
           <a:p>
@@ -6925,7 +8452,7 @@
               </a:defRPr>
             </a:pPr>
             <a:r>
-              <a:t>      SCOREBOARD).</a:t>
+              <a:t>      [LEARNING_GUIDE § 8](LEARNING_GU</a:t>
             </a:r>
           </a:p>
           <a:p>
@@ -6944,7 +8471,7 @@
               </a:defRPr>
             </a:pPr>
             <a:r>
-              <a:t>• Scoreboard checks (expected vs observed address+data</a:t>
+              <a:t>      IDE_PROTOCOLS_AND_UVM.md#8-i2c-</a:t>
             </a:r>
           </a:p>
           <a:p>
@@ -6963,33 +8490,38 @@
               </a:defRPr>
             </a:pPr>
             <a:r>
-              <a:t>      from the bus).</a:t>
-            </a:r>
-          </a:p>
-          <a:p>
-            <a:pPr>
-              <a:lnSpc>
-                <a:spcPts val="2200"/>
-              </a:lnSpc>
-              <a:spcAft>
-                <a:spcPts val="1000"/>
-              </a:spcAft>
-              <a:defRPr sz="2000" b="0">
-                <a:solidFill>
-                  <a:srgbClr val="333333"/>
-                </a:solidFill>
-                <a:latin typeface="Calibri"/>
-              </a:defRPr>
-            </a:pPr>
-            <a:r>
-              <a:t>• Final scoreboard summary (matches and mismatches).</a:t>
-            </a:r>
-          </a:p>
-        </p:txBody>
-      </p:sp>
-      <p:sp>
-        <p:nvSpPr>
-          <p:cNvPr id="4" name="TextBox 3"/>
+              <a:t>      uvm-…</a:t>
+            </a:r>
+          </a:p>
+        </p:txBody>
+      </p:sp>
+      <p:pic>
+        <p:nvPicPr>
+          <p:cNvPr id="4" name="Picture 3" descr="testing_methods.png"/>
+          <p:cNvPicPr>
+            <a:picLocks noChangeAspect="1"/>
+          </p:cNvPicPr>
+          <p:nvPr/>
+        </p:nvPicPr>
+        <p:blipFill>
+          <a:blip r:embed="rId2"/>
+          <a:stretch>
+            <a:fillRect/>
+          </a:stretch>
+        </p:blipFill>
+        <p:spPr>
+          <a:xfrm>
+            <a:off x="6172200" y="2094547"/>
+            <a:ext cx="5394960" cy="3034665"/>
+          </a:xfrm>
+          <a:prstGeom prst="rect">
+            <a:avLst/>
+          </a:prstGeom>
+        </p:spPr>
+      </p:pic>
+      <p:sp>
+        <p:nvSpPr>
+          <p:cNvPr id="5" name="TextBox 4"/>
           <p:cNvSpPr txBox="1"/>
           <p:nvPr/>
         </p:nvSpPr>
@@ -7052,8 +8584,8 @@
         </p:nvSpPr>
         <p:spPr>
           <a:xfrm>
-            <a:off x="548640" y="411480"/>
-            <a:ext cx="11064240" cy="777240"/>
+            <a:off x="548640" y="2743200"/>
+            <a:ext cx="11064240" cy="1371600"/>
           </a:xfrm>
           <a:prstGeom prst="rect">
             <a:avLst/>
@@ -7066,11 +8598,11 @@
           </a:bodyPr>
           <a:lstStyle/>
           <a:p>
-            <a:pPr>
-              <a:lnSpc>
-                <a:spcPts val="2200"/>
-              </a:lnSpc>
-              <a:defRPr sz="2800" b="1">
+            <a:pPr algn="ctr">
+              <a:lnSpc>
+                <a:spcPts val="2200"/>
+              </a:lnSpc>
+              <a:defRPr sz="3600" b="1">
                 <a:solidFill>
                   <a:srgbClr val="1A1A2E"/>
                 </a:solidFill>
@@ -7078,7 +8610,7 @@
               </a:defRPr>
             </a:pPr>
             <a:r>
-              <a:t>Demo: I²C UVM</a:t>
+              <a:t>Syllabus topics</a:t>
             </a:r>
           </a:p>
         </p:txBody>
@@ -7086,74 +8618,6 @@
       <p:sp>
         <p:nvSpPr>
           <p:cNvPr id="3" name="TextBox 2"/>
-          <p:cNvSpPr txBox="1"/>
-          <p:nvPr/>
-        </p:nvSpPr>
-        <p:spPr>
-          <a:xfrm>
-            <a:off x="548640" y="1051560"/>
-            <a:ext cx="11064240" cy="914400"/>
-          </a:xfrm>
-          <a:prstGeom prst="rect">
-            <a:avLst/>
-          </a:prstGeom>
-          <a:solidFill>
-            <a:srgbClr val="F4F4F4"/>
-          </a:solidFill>
-        </p:spPr>
-        <p:txBody>
-          <a:bodyPr wrap="square">
-            <a:noAutofit/>
-          </a:bodyPr>
-          <a:lstStyle/>
-          <a:p>
-            <a:pPr>
-              <a:lnSpc>
-                <a:spcPts val="2200"/>
-              </a:lnSpc>
-              <a:spcAft>
-                <a:spcPts val="200"/>
-              </a:spcAft>
-              <a:defRPr sz="2000" b="0">
-                <a:solidFill>
-                  <a:srgbClr val="333333"/>
-                </a:solidFill>
-                <a:latin typeface="Consolas"/>
-              </a:defRPr>
-            </a:pPr>
-            <a:r>
-              <a:t>$ ./scripts/module8.sh --run</a:t>
-            </a:r>
-          </a:p>
-        </p:txBody>
-      </p:sp>
-      <p:pic>
-        <p:nvPicPr>
-          <p:cNvPr id="4" name="Picture 3" descr="i2c_uvm.png"/>
-          <p:cNvPicPr>
-            <a:picLocks noChangeAspect="1"/>
-          </p:cNvPicPr>
-          <p:nvPr/>
-        </p:nvPicPr>
-        <p:blipFill>
-          <a:blip r:embed="rId2"/>
-          <a:stretch>
-            <a:fillRect/>
-          </a:stretch>
-        </p:blipFill>
-        <p:spPr>
-          <a:xfrm>
-            <a:off x="548640" y="1965960"/>
-            <a:ext cx="7071358" cy="3977639"/>
-          </a:xfrm>
-          <a:prstGeom prst="rect">
-            <a:avLst/>
-          </a:prstGeom>
-        </p:spPr>
-      </p:pic>
-      <p:sp>
-        <p:nvSpPr>
-          <p:cNvPr id="5" name="TextBox 4"/>
           <p:cNvSpPr txBox="1"/>
           <p:nvPr/>
         </p:nvSpPr>
@@ -7216,8 +8680,8 @@
         </p:nvSpPr>
         <p:spPr>
           <a:xfrm>
-            <a:off x="548640" y="2743200"/>
-            <a:ext cx="11064240" cy="1371600"/>
+            <a:off x="548640" y="411480"/>
+            <a:ext cx="11064240" cy="777240"/>
           </a:xfrm>
           <a:prstGeom prst="rect">
             <a:avLst/>
@@ -7230,11 +8694,11 @@
           </a:bodyPr>
           <a:lstStyle/>
           <a:p>
-            <a:pPr algn="ctr">
-              <a:lnSpc>
-                <a:spcPts val="2200"/>
-              </a:lnSpc>
-              <a:defRPr sz="3600" b="1">
+            <a:pPr>
+              <a:lnSpc>
+                <a:spcPts val="2200"/>
+              </a:lnSpc>
+              <a:defRPr sz="2800" b="1">
                 <a:solidFill>
                   <a:srgbClr val="1A1A2E"/>
                 </a:solidFill>
@@ -7242,7 +8706,7 @@
               </a:defRPr>
             </a:pPr>
             <a:r>
-              <a:t>Practice &amp; assessment</a:t>
+              <a:t>1. I²C protocol recap</a:t>
             </a:r>
           </a:p>
         </p:txBody>
@@ -7250,6 +8714,67 @@
       <p:sp>
         <p:nvSpPr>
           <p:cNvPr id="3" name="TextBox 2"/>
+          <p:cNvSpPr txBox="1"/>
+          <p:nvPr/>
+        </p:nvSpPr>
+        <p:spPr>
+          <a:xfrm>
+            <a:off x="548640" y="1234440"/>
+            <a:ext cx="11064240" cy="4937760"/>
+          </a:xfrm>
+          <a:prstGeom prst="rect">
+            <a:avLst/>
+          </a:prstGeom>
+          <a:noFill/>
+        </p:spPr>
+        <p:txBody>
+          <a:bodyPr wrap="square">
+            <a:noAutofit/>
+          </a:bodyPr>
+          <a:lstStyle/>
+          <a:p>
+            <a:pPr>
+              <a:lnSpc>
+                <a:spcPts val="2200"/>
+              </a:lnSpc>
+              <a:spcAft>
+                <a:spcPts val="1000"/>
+              </a:spcAft>
+              <a:defRPr sz="2000" b="0">
+                <a:solidFill>
+                  <a:srgbClr val="333333"/>
+                </a:solidFill>
+                <a:latin typeface="Calibri"/>
+              </a:defRPr>
+            </a:pPr>
+            <a:r>
+              <a:t>• START/STOP on SCL high; MSB-first address and data</a:t>
+            </a:r>
+          </a:p>
+          <a:p>
+            <a:pPr>
+              <a:lnSpc>
+                <a:spcPts val="2200"/>
+              </a:lnSpc>
+              <a:spcAft>
+                <a:spcPts val="1000"/>
+              </a:spcAft>
+              <a:defRPr sz="2000" b="0">
+                <a:solidFill>
+                  <a:srgbClr val="333333"/>
+                </a:solidFill>
+                <a:latin typeface="Calibri"/>
+              </a:defRPr>
+            </a:pPr>
+            <a:r>
+              <a:t>      on SDA.</a:t>
+            </a:r>
+          </a:p>
+        </p:txBody>
+      </p:sp>
+      <p:sp>
+        <p:nvSpPr>
+          <p:cNvPr id="4" name="TextBox 3"/>
           <p:cNvSpPr txBox="1"/>
           <p:nvPr/>
         </p:nvSpPr>
@@ -7338,7 +8863,7 @@
               </a:defRPr>
             </a:pPr>
             <a:r>
-              <a:t>What you should know</a:t>
+              <a:t>2. Toolchain</a:t>
             </a:r>
           </a:p>
         </p:txBody>
@@ -7380,7 +8905,7 @@
               </a:defRPr>
             </a:pPr>
             <a:r>
-              <a:t>• Describe the I²C UVM agent and how I2cMonitor maps</a:t>
+              <a:t>• `make SIM=verilator TEST=test_i2c_uvm`;</a:t>
             </a:r>
           </a:p>
           <a:p>
@@ -7399,102 +8924,7 @@
               </a:defRPr>
             </a:pPr>
             <a:r>
-              <a:t>      to SCL/SDA behavior.</a:t>
-            </a:r>
-          </a:p>
-          <a:p>
-            <a:pPr>
-              <a:lnSpc>
-                <a:spcPts val="2200"/>
-              </a:lnSpc>
-              <a:spcAft>
-                <a:spcPts val="1000"/>
-              </a:spcAft>
-              <a:defRPr sz="2000" b="0">
-                <a:solidFill>
-                  <a:srgbClr val="333333"/>
-                </a:solidFill>
-                <a:latin typeface="Calibri"/>
-              </a:defRPr>
-            </a:pPr>
-            <a:r>
-              <a:t>• Explain two-phase scoreboard checking (address vs</a:t>
-            </a:r>
-          </a:p>
-          <a:p>
-            <a:pPr>
-              <a:lnSpc>
-                <a:spcPts val="2200"/>
-              </a:lnSpc>
-              <a:spcAft>
-                <a:spcPts val="1000"/>
-              </a:spcAft>
-              <a:defRPr sz="2000" b="0">
-                <a:solidFill>
-                  <a:srgbClr val="333333"/>
-                </a:solidFill>
-                <a:latin typeface="Calibri"/>
-              </a:defRPr>
-            </a:pPr>
-            <a:r>
-              <a:t>      data).</a:t>
-            </a:r>
-          </a:p>
-          <a:p>
-            <a:pPr>
-              <a:lnSpc>
-                <a:spcPts val="2200"/>
-              </a:lnSpc>
-              <a:spcAft>
-                <a:spcPts val="1000"/>
-              </a:spcAft>
-              <a:defRPr sz="2000" b="0">
-                <a:solidFill>
-                  <a:srgbClr val="333333"/>
-                </a:solidFill>
-                <a:latin typeface="Calibri"/>
-              </a:defRPr>
-            </a:pPr>
-            <a:r>
-              <a:t>• Run `i2c_uvm` and interpret UVM / scoreboard output.</a:t>
-            </a:r>
-          </a:p>
-          <a:p>
-            <a:pPr>
-              <a:lnSpc>
-                <a:spcPts val="2200"/>
-              </a:lnSpc>
-              <a:spcAft>
-                <a:spcPts val="1000"/>
-              </a:spcAft>
-              <a:defRPr sz="2000" b="0">
-                <a:solidFill>
-                  <a:srgbClr val="333333"/>
-                </a:solidFill>
-                <a:latin typeface="Calibri"/>
-              </a:defRPr>
-            </a:pPr>
-            <a:r>
-              <a:t>• Compare verification architecture across UART, SPI,</a:t>
-            </a:r>
-          </a:p>
-          <a:p>
-            <a:pPr>
-              <a:lnSpc>
-                <a:spcPts val="2200"/>
-              </a:lnSpc>
-              <a:spcAft>
-                <a:spcPts val="1000"/>
-              </a:spcAft>
-              <a:defRPr sz="2000" b="0">
-                <a:solidFill>
-                  <a:srgbClr val="333333"/>
-                </a:solidFill>
-                <a:latin typeface="Calibri"/>
-              </a:defRPr>
-            </a:pPr>
-            <a:r>
-              <a:t>      and I²C modules in this course.</a:t>
+              <a:t>      `+UVM_TESTNAME=test_i2c_uvm`.</a:t>
             </a:r>
           </a:p>
         </p:txBody>
@@ -7564,8 +8994,8 @@
         </p:nvSpPr>
         <p:spPr>
           <a:xfrm>
-            <a:off x="548640" y="411480"/>
-            <a:ext cx="11064240" cy="777240"/>
+            <a:off x="548640" y="2743200"/>
+            <a:ext cx="11064240" cy="1371600"/>
           </a:xfrm>
           <a:prstGeom prst="rect">
             <a:avLst/>
@@ -7578,11 +9008,11 @@
           </a:bodyPr>
           <a:lstStyle/>
           <a:p>
-            <a:pPr>
-              <a:lnSpc>
-                <a:spcPts val="2200"/>
-              </a:lnSpc>
-              <a:defRPr sz="2800" b="1">
+            <a:pPr algn="ctr">
+              <a:lnSpc>
+                <a:spcPts val="2200"/>
+              </a:lnSpc>
+              <a:defRPr sz="3600" b="1">
                 <a:solidFill>
                   <a:srgbClr val="1A1A2E"/>
                 </a:solidFill>
@@ -7590,7 +9020,7 @@
               </a:defRPr>
             </a:pPr>
             <a:r>
-              <a:t>Exercises</a:t>
+              <a:t>Hands-on examples</a:t>
             </a:r>
           </a:p>
         </p:txBody>
@@ -7598,105 +9028,6 @@
       <p:sp>
         <p:nvSpPr>
           <p:cNvPr id="3" name="TextBox 2"/>
-          <p:cNvSpPr txBox="1"/>
-          <p:nvPr/>
-        </p:nvSpPr>
-        <p:spPr>
-          <a:xfrm>
-            <a:off x="548640" y="1234440"/>
-            <a:ext cx="11064240" cy="4937760"/>
-          </a:xfrm>
-          <a:prstGeom prst="rect">
-            <a:avLst/>
-          </a:prstGeom>
-          <a:noFill/>
-        </p:spPr>
-        <p:txBody>
-          <a:bodyPr wrap="square">
-            <a:noAutofit/>
-          </a:bodyPr>
-          <a:lstStyle/>
-          <a:p>
-            <a:pPr>
-              <a:lnSpc>
-                <a:spcPts val="2200"/>
-              </a:lnSpc>
-              <a:spcAft>
-                <a:spcPts val="1000"/>
-              </a:spcAft>
-              <a:defRPr sz="2000" b="0">
-                <a:solidFill>
-                  <a:srgbClr val="333333"/>
-                </a:solidFill>
-                <a:latin typeface="Calibri"/>
-              </a:defRPr>
-            </a:pPr>
-            <a:r>
-              <a:t>• Run i2c_uvm</a:t>
-            </a:r>
-          </a:p>
-          <a:p>
-            <a:pPr>
-              <a:lnSpc>
-                <a:spcPts val="2200"/>
-              </a:lnSpc>
-              <a:spcAft>
-                <a:spcPts val="1000"/>
-              </a:spcAft>
-              <a:defRPr sz="2000" b="0">
-                <a:solidFill>
-                  <a:srgbClr val="333333"/>
-                </a:solidFill>
-                <a:latin typeface="Calibri"/>
-              </a:defRPr>
-            </a:pPr>
-            <a:r>
-              <a:t>• Trace one transaction</a:t>
-            </a:r>
-          </a:p>
-          <a:p>
-            <a:pPr>
-              <a:lnSpc>
-                <a:spcPts val="2200"/>
-              </a:lnSpc>
-              <a:spcAft>
-                <a:spcPts val="1000"/>
-              </a:spcAft>
-              <a:defRPr sz="2000" b="0">
-                <a:solidFill>
-                  <a:srgbClr val="333333"/>
-                </a:solidFill>
-                <a:latin typeface="Calibri"/>
-              </a:defRPr>
-            </a:pPr>
-            <a:r>
-              <a:t>• Change the sequence</a:t>
-            </a:r>
-          </a:p>
-          <a:p>
-            <a:pPr>
-              <a:lnSpc>
-                <a:spcPts val="2200"/>
-              </a:lnSpc>
-              <a:spcAft>
-                <a:spcPts val="1000"/>
-              </a:spcAft>
-              <a:defRPr sz="2000" b="0">
-                <a:solidFill>
-                  <a:srgbClr val="333333"/>
-                </a:solidFill>
-                <a:latin typeface="Calibri"/>
-              </a:defRPr>
-            </a:pPr>
-            <a:r>
-              <a:t>• Compare across protocols</a:t>
-            </a:r>
-          </a:p>
-        </p:txBody>
-      </p:sp>
-      <p:sp>
-        <p:nvSpPr>
-          <p:cNvPr id="4" name="TextBox 3"/>
           <p:cNvSpPr txBox="1"/>
           <p:nvPr/>
         </p:nvSpPr>
@@ -7785,7 +9116,7 @@
               </a:defRPr>
             </a:pPr>
             <a:r>
-              <a:t>Assessment checklist</a:t>
+              <a:t>Module 8 self-check</a:t>
             </a:r>
           </a:p>
         </p:txBody>
@@ -7798,13 +9129,15 @@
         </p:nvSpPr>
         <p:spPr>
           <a:xfrm>
-            <a:off x="548640" y="1234440"/>
-            <a:ext cx="11064240" cy="4937760"/>
-          </a:xfrm>
-          <a:prstGeom prst="rect">
-            <a:avLst/>
-          </a:prstGeom>
-          <a:noFill/>
+            <a:off x="548640" y="1051560"/>
+            <a:ext cx="11064240" cy="914400"/>
+          </a:xfrm>
+          <a:prstGeom prst="rect">
+            <a:avLst/>
+          </a:prstGeom>
+          <a:solidFill>
+            <a:srgbClr val="F4F4F4"/>
+          </a:solidFill>
         </p:spPr>
         <p:txBody>
           <a:bodyPr wrap="square">
@@ -7817,81 +9150,48 @@
                 <a:spcPts val="2200"/>
               </a:lnSpc>
               <a:spcAft>
-                <a:spcPts val="1000"/>
-              </a:spcAft>
-              <a:defRPr sz="2000" b="0">
-                <a:solidFill>
-                  <a:srgbClr val="333333"/>
-                </a:solidFill>
-                <a:latin typeface="Calibri"/>
-              </a:defRPr>
-            </a:pPr>
-            <a:r>
-              <a:t>• Can describe the I²C UVM agent and how it maps to</a:t>
-            </a:r>
-          </a:p>
-          <a:p>
-            <a:pPr>
-              <a:lnSpc>
-                <a:spcPts val="2200"/>
-              </a:lnSpc>
-              <a:spcAft>
-                <a:spcPts val="1000"/>
-              </a:spcAft>
-              <a:defRPr sz="2000" b="0">
-                <a:solidFill>
-                  <a:srgbClr val="333333"/>
-                </a:solidFill>
-                <a:latin typeface="Calibri"/>
-              </a:defRPr>
-            </a:pPr>
-            <a:r>
-              <a:t>      I²C (addr+data, monitor on SCL/SDA).</a:t>
-            </a:r>
-          </a:p>
-          <a:p>
-            <a:pPr>
-              <a:lnSpc>
-                <a:spcPts val="2200"/>
-              </a:lnSpc>
-              <a:spcAft>
-                <a:spcPts val="1000"/>
-              </a:spcAft>
-              <a:defRPr sz="2000" b="0">
-                <a:solidFill>
-                  <a:srgbClr val="333333"/>
-                </a:solidFill>
-                <a:latin typeface="Calibri"/>
-              </a:defRPr>
-            </a:pPr>
-            <a:r>
-              <a:t>• Can run i2c_uvm and interpret UVM output.</a:t>
-            </a:r>
-          </a:p>
-          <a:p>
-            <a:pPr>
-              <a:lnSpc>
-                <a:spcPts val="2200"/>
-              </a:lnSpc>
-              <a:spcAft>
-                <a:spcPts val="1000"/>
-              </a:spcAft>
-              <a:defRPr sz="2000" b="0">
-                <a:solidFill>
-                  <a:srgbClr val="333333"/>
-                </a:solidFill>
-                <a:latin typeface="Calibri"/>
-              </a:defRPr>
-            </a:pPr>
-            <a:r>
-              <a:t>• Can compare UVM structure across UART, SPI, and I²C.</a:t>
-            </a:r>
-          </a:p>
-        </p:txBody>
-      </p:sp>
-      <p:sp>
-        <p:nvSpPr>
-          <p:cNvPr id="4" name="TextBox 3"/>
+                <a:spcPts val="200"/>
+              </a:spcAft>
+              <a:defRPr sz="2000" b="0">
+                <a:solidFill>
+                  <a:srgbClr val="333333"/>
+                </a:solidFill>
+                <a:latin typeface="Consolas"/>
+              </a:defRPr>
+            </a:pPr>
+            <a:r>
+              <a:t>$ ./scripts/module8.sh --help</a:t>
+            </a:r>
+          </a:p>
+        </p:txBody>
+      </p:sp>
+      <p:pic>
+        <p:nvPicPr>
+          <p:cNvPr id="4" name="Picture 3" descr="module8_check.png"/>
+          <p:cNvPicPr>
+            <a:picLocks noChangeAspect="1"/>
+          </p:cNvPicPr>
+          <p:nvPr/>
+        </p:nvPicPr>
+        <p:blipFill>
+          <a:blip r:embed="rId2"/>
+          <a:stretch>
+            <a:fillRect/>
+          </a:stretch>
+        </p:blipFill>
+        <p:spPr>
+          <a:xfrm>
+            <a:off x="548640" y="1965960"/>
+            <a:ext cx="7071358" cy="3977639"/>
+          </a:xfrm>
+          <a:prstGeom prst="rect">
+            <a:avLst/>
+          </a:prstGeom>
+        </p:spPr>
+      </p:pic>
+      <p:sp>
+        <p:nvSpPr>
+          <p:cNvPr id="5" name="TextBox 4"/>
           <p:cNvSpPr txBox="1"/>
           <p:nvPr/>
         </p:nvSpPr>
@@ -8156,7 +9456,7 @@
               </a:defRPr>
             </a:pPr>
             <a:r>
-              <a:t>Summary &amp; next steps</a:t>
+              <a:t>Example 1: I²C UVM agent</a:t>
             </a:r>
           </a:p>
         </p:txBody>
@@ -8198,7 +9498,7 @@
               </a:defRPr>
             </a:pPr>
             <a:r>
-              <a:t>• Extend I²C verification to **UVM+SV** — I²C agent</a:t>
+              <a:t>• I²C DUT from Module 7 with UVM agent and two-phase</a:t>
             </a:r>
           </a:p>
           <a:p>
@@ -8217,7 +9517,7 @@
               </a:defRPr>
             </a:pPr>
             <a:r>
-              <a:t>      (transaction, sequence, driver, monitor, scoreboa…</a:t>
+              <a:t>      scoreboard (addr + data)</a:t>
             </a:r>
           </a:p>
           <a:p>
@@ -8236,7 +9536,7 @@
               </a:defRPr>
             </a:pPr>
             <a:r>
-              <a:t>• Complete module8/CHECKLIST.md</a:t>
+              <a:t>• `I2cMonitor` reuses baseline bus-sampling ideas in</a:t>
             </a:r>
           </a:p>
           <a:p>
@@ -8255,7 +9555,7 @@
               </a:defRPr>
             </a:pPr>
             <a:r>
-              <a:t>• Review module8/EXAMPLES.md and run each lab</a:t>
+              <a:t>      reusable form</a:t>
             </a:r>
           </a:p>
           <a:p>
@@ -8274,7 +9574,1510 @@
               </a:defRPr>
             </a:pPr>
             <a:r>
-              <a:t>• Next: Next module in course</a:t>
+              <a:t>• Course capstone: compare UART, SPI, and I²C</a:t>
+            </a:r>
+          </a:p>
+          <a:p>
+            <a:pPr>
+              <a:lnSpc>
+                <a:spcPts val="2200"/>
+              </a:lnSpc>
+              <a:spcAft>
+                <a:spcPts val="1000"/>
+              </a:spcAft>
+              <a:defRPr sz="2000" b="0">
+                <a:solidFill>
+                  <a:srgbClr val="333333"/>
+                </a:solidFill>
+                <a:latin typeface="Calibri"/>
+              </a:defRPr>
+            </a:pPr>
+            <a:r>
+              <a:t>      verification patterns</a:t>
+            </a:r>
+          </a:p>
+        </p:txBody>
+      </p:sp>
+      <p:sp>
+        <p:nvSpPr>
+          <p:cNvPr id="4" name="TextBox 3"/>
+          <p:cNvSpPr txBox="1"/>
+          <p:nvPr/>
+        </p:nvSpPr>
+        <p:spPr>
+          <a:xfrm>
+            <a:off x="548640" y="6355080"/>
+            <a:ext cx="11064240" cy="320040"/>
+          </a:xfrm>
+          <a:prstGeom prst="rect">
+            <a:avLst/>
+          </a:prstGeom>
+          <a:noFill/>
+        </p:spPr>
+        <p:txBody>
+          <a:bodyPr wrap="square">
+            <a:noAutofit/>
+          </a:bodyPr>
+          <a:lstStyle/>
+          <a:p>
+            <a:pPr algn="r">
+              <a:lnSpc>
+                <a:spcPts val="2200"/>
+              </a:lnSpc>
+              <a:defRPr sz="1000" b="0">
+                <a:solidFill>
+                  <a:srgbClr val="666666"/>
+                </a:solidFill>
+                <a:latin typeface="Calibri"/>
+              </a:defRPr>
+            </a:pPr>
+            <a:r>
+              <a:t>learn_uart_spi_i2c / Module 8</a:t>
+            </a:r>
+          </a:p>
+        </p:txBody>
+      </p:sp>
+    </p:spTree>
+  </p:cSld>
+  <p:clrMapOvr>
+    <a:masterClrMapping/>
+  </p:clrMapOvr>
+</p:sld>
+</file>
+
+<file path=ppt/slides/slide31.xml><?xml version="1.0" encoding="utf-8"?>
+<p:sld xmlns:a="http://schemas.openxmlformats.org/drawingml/2006/main" xmlns:p="http://schemas.openxmlformats.org/presentationml/2006/main" xmlns:r="http://schemas.openxmlformats.org/officeDocument/2006/relationships">
+  <p:cSld>
+    <p:spTree>
+      <p:nvGrpSpPr>
+        <p:cNvPr id="1" name=""/>
+        <p:cNvGrpSpPr/>
+        <p:nvPr/>
+      </p:nvGrpSpPr>
+      <p:grpSpPr/>
+      <p:sp>
+        <p:nvSpPr>
+          <p:cNvPr id="2" name="TextBox 1"/>
+          <p:cNvSpPr txBox="1"/>
+          <p:nvPr/>
+        </p:nvSpPr>
+        <p:spPr>
+          <a:xfrm>
+            <a:off x="548640" y="411480"/>
+            <a:ext cx="11064240" cy="777240"/>
+          </a:xfrm>
+          <a:prstGeom prst="rect">
+            <a:avLst/>
+          </a:prstGeom>
+          <a:noFill/>
+        </p:spPr>
+        <p:txBody>
+          <a:bodyPr wrap="square">
+            <a:noAutofit/>
+          </a:bodyPr>
+          <a:lstStyle/>
+          <a:p>
+            <a:pPr>
+              <a:lnSpc>
+                <a:spcPts val="2200"/>
+              </a:lnSpc>
+              <a:defRPr sz="2800" b="1">
+                <a:solidFill>
+                  <a:srgbClr val="1A1A2E"/>
+                </a:solidFill>
+                <a:latin typeface="Calibri"/>
+              </a:defRPr>
+            </a:pPr>
+            <a:r>
+              <a:t>Demo: I²C UVM agent</a:t>
+            </a:r>
+          </a:p>
+        </p:txBody>
+      </p:sp>
+      <p:sp>
+        <p:nvSpPr>
+          <p:cNvPr id="3" name="TextBox 2"/>
+          <p:cNvSpPr txBox="1"/>
+          <p:nvPr/>
+        </p:nvSpPr>
+        <p:spPr>
+          <a:xfrm>
+            <a:off x="548640" y="1051560"/>
+            <a:ext cx="11064240" cy="914400"/>
+          </a:xfrm>
+          <a:prstGeom prst="rect">
+            <a:avLst/>
+          </a:prstGeom>
+          <a:solidFill>
+            <a:srgbClr val="F4F4F4"/>
+          </a:solidFill>
+        </p:spPr>
+        <p:txBody>
+          <a:bodyPr wrap="square">
+            <a:noAutofit/>
+          </a:bodyPr>
+          <a:lstStyle/>
+          <a:p>
+            <a:pPr>
+              <a:lnSpc>
+                <a:spcPts val="2200"/>
+              </a:lnSpc>
+              <a:spcAft>
+                <a:spcPts val="200"/>
+              </a:spcAft>
+              <a:defRPr sz="2000" b="0">
+                <a:solidFill>
+                  <a:srgbClr val="333333"/>
+                </a:solidFill>
+                <a:latin typeface="Consolas"/>
+              </a:defRPr>
+            </a:pPr>
+            <a:r>
+              <a:t>$ cd module8/examples/i2c_uvm &amp;&amp; make SIM=verilator TEST=test_i2c_uvm</a:t>
+            </a:r>
+          </a:p>
+        </p:txBody>
+      </p:sp>
+      <p:pic>
+        <p:nvPicPr>
+          <p:cNvPr id="4" name="Picture 3" descr="ex01_i2c_uvm.png"/>
+          <p:cNvPicPr>
+            <a:picLocks noChangeAspect="1"/>
+          </p:cNvPicPr>
+          <p:nvPr/>
+        </p:nvPicPr>
+        <p:blipFill>
+          <a:blip r:embed="rId2"/>
+          <a:stretch>
+            <a:fillRect/>
+          </a:stretch>
+        </p:blipFill>
+        <p:spPr>
+          <a:xfrm>
+            <a:off x="548640" y="1965960"/>
+            <a:ext cx="7071358" cy="3977639"/>
+          </a:xfrm>
+          <a:prstGeom prst="rect">
+            <a:avLst/>
+          </a:prstGeom>
+        </p:spPr>
+      </p:pic>
+      <p:sp>
+        <p:nvSpPr>
+          <p:cNvPr id="5" name="TextBox 4"/>
+          <p:cNvSpPr txBox="1"/>
+          <p:nvPr/>
+        </p:nvSpPr>
+        <p:spPr>
+          <a:xfrm>
+            <a:off x="548640" y="6355080"/>
+            <a:ext cx="11064240" cy="320040"/>
+          </a:xfrm>
+          <a:prstGeom prst="rect">
+            <a:avLst/>
+          </a:prstGeom>
+          <a:noFill/>
+        </p:spPr>
+        <p:txBody>
+          <a:bodyPr wrap="square">
+            <a:noAutofit/>
+          </a:bodyPr>
+          <a:lstStyle/>
+          <a:p>
+            <a:pPr algn="r">
+              <a:lnSpc>
+                <a:spcPts val="2200"/>
+              </a:lnSpc>
+              <a:defRPr sz="1000" b="0">
+                <a:solidFill>
+                  <a:srgbClr val="666666"/>
+                </a:solidFill>
+                <a:latin typeface="Calibri"/>
+              </a:defRPr>
+            </a:pPr>
+            <a:r>
+              <a:t>learn_uart_spi_i2c / Module 8</a:t>
+            </a:r>
+          </a:p>
+        </p:txBody>
+      </p:sp>
+    </p:spTree>
+  </p:cSld>
+  <p:clrMapOvr>
+    <a:masterClrMapping/>
+  </p:clrMapOvr>
+</p:sld>
+</file>
+
+<file path=ppt/slides/slide32.xml><?xml version="1.0" encoding="utf-8"?>
+<p:sld xmlns:a="http://schemas.openxmlformats.org/drawingml/2006/main" xmlns:p="http://schemas.openxmlformats.org/presentationml/2006/main" xmlns:r="http://schemas.openxmlformats.org/officeDocument/2006/relationships">
+  <p:cSld>
+    <p:spTree>
+      <p:nvGrpSpPr>
+        <p:cNvPr id="1" name=""/>
+        <p:cNvGrpSpPr/>
+        <p:nvPr/>
+      </p:nvGrpSpPr>
+      <p:grpSpPr/>
+      <p:sp>
+        <p:nvSpPr>
+          <p:cNvPr id="2" name="TextBox 1"/>
+          <p:cNvSpPr txBox="1"/>
+          <p:nvPr/>
+        </p:nvSpPr>
+        <p:spPr>
+          <a:xfrm>
+            <a:off x="548640" y="2743200"/>
+            <a:ext cx="11064240" cy="1371600"/>
+          </a:xfrm>
+          <a:prstGeom prst="rect">
+            <a:avLst/>
+          </a:prstGeom>
+          <a:noFill/>
+        </p:spPr>
+        <p:txBody>
+          <a:bodyPr wrap="square">
+            <a:noAutofit/>
+          </a:bodyPr>
+          <a:lstStyle/>
+          <a:p>
+            <a:pPr algn="ctr">
+              <a:lnSpc>
+                <a:spcPts val="2200"/>
+              </a:lnSpc>
+              <a:defRPr sz="3600" b="1">
+                <a:solidFill>
+                  <a:srgbClr val="1A1A2E"/>
+                </a:solidFill>
+                <a:latin typeface="Calibri"/>
+              </a:defRPr>
+            </a:pPr>
+            <a:r>
+              <a:t>Key concepts</a:t>
+            </a:r>
+          </a:p>
+        </p:txBody>
+      </p:sp>
+      <p:sp>
+        <p:nvSpPr>
+          <p:cNvPr id="3" name="TextBox 2"/>
+          <p:cNvSpPr txBox="1"/>
+          <p:nvPr/>
+        </p:nvSpPr>
+        <p:spPr>
+          <a:xfrm>
+            <a:off x="548640" y="6355080"/>
+            <a:ext cx="11064240" cy="320040"/>
+          </a:xfrm>
+          <a:prstGeom prst="rect">
+            <a:avLst/>
+          </a:prstGeom>
+          <a:noFill/>
+        </p:spPr>
+        <p:txBody>
+          <a:bodyPr wrap="square">
+            <a:noAutofit/>
+          </a:bodyPr>
+          <a:lstStyle/>
+          <a:p>
+            <a:pPr algn="r">
+              <a:lnSpc>
+                <a:spcPts val="2200"/>
+              </a:lnSpc>
+              <a:defRPr sz="1000" b="0">
+                <a:solidFill>
+                  <a:srgbClr val="666666"/>
+                </a:solidFill>
+                <a:latin typeface="Calibri"/>
+              </a:defRPr>
+            </a:pPr>
+            <a:r>
+              <a:t>learn_uart_spi_i2c / Module 8</a:t>
+            </a:r>
+          </a:p>
+        </p:txBody>
+      </p:sp>
+    </p:spTree>
+  </p:cSld>
+  <p:clrMapOvr>
+    <a:masterClrMapping/>
+  </p:clrMapOvr>
+</p:sld>
+</file>
+
+<file path=ppt/slides/slide33.xml><?xml version="1.0" encoding="utf-8"?>
+<p:sld xmlns:a="http://schemas.openxmlformats.org/drawingml/2006/main" xmlns:p="http://schemas.openxmlformats.org/presentationml/2006/main" xmlns:r="http://schemas.openxmlformats.org/officeDocument/2006/relationships">
+  <p:cSld>
+    <p:spTree>
+      <p:nvGrpSpPr>
+        <p:cNvPr id="1" name=""/>
+        <p:cNvGrpSpPr/>
+        <p:nvPr/>
+      </p:nvGrpSpPr>
+      <p:grpSpPr/>
+      <p:sp>
+        <p:nvSpPr>
+          <p:cNvPr id="2" name="TextBox 1"/>
+          <p:cNvSpPr txBox="1"/>
+          <p:nvPr/>
+        </p:nvSpPr>
+        <p:spPr>
+          <a:xfrm>
+            <a:off x="548640" y="411480"/>
+            <a:ext cx="11064240" cy="777240"/>
+          </a:xfrm>
+          <a:prstGeom prst="rect">
+            <a:avLst/>
+          </a:prstGeom>
+          <a:noFill/>
+        </p:spPr>
+        <p:txBody>
+          <a:bodyPr wrap="square">
+            <a:noAutofit/>
+          </a:bodyPr>
+          <a:lstStyle/>
+          <a:p>
+            <a:pPr>
+              <a:lnSpc>
+                <a:spcPts val="2200"/>
+              </a:lnSpc>
+              <a:defRPr sz="2800" b="1">
+                <a:solidFill>
+                  <a:srgbClr val="1A1A2E"/>
+                </a:solidFill>
+                <a:latin typeface="Calibri"/>
+              </a:defRPr>
+            </a:pPr>
+            <a:r>
+              <a:t>1. Two-phase scoreboard</a:t>
+            </a:r>
+          </a:p>
+        </p:txBody>
+      </p:sp>
+      <p:sp>
+        <p:nvSpPr>
+          <p:cNvPr id="3" name="TextBox 2"/>
+          <p:cNvSpPr txBox="1"/>
+          <p:nvPr/>
+        </p:nvSpPr>
+        <p:spPr>
+          <a:xfrm>
+            <a:off x="548640" y="1234440"/>
+            <a:ext cx="11064240" cy="4937760"/>
+          </a:xfrm>
+          <a:prstGeom prst="rect">
+            <a:avLst/>
+          </a:prstGeom>
+          <a:noFill/>
+        </p:spPr>
+        <p:txBody>
+          <a:bodyPr wrap="square">
+            <a:noAutofit/>
+          </a:bodyPr>
+          <a:lstStyle/>
+          <a:p>
+            <a:pPr>
+              <a:lnSpc>
+                <a:spcPts val="2200"/>
+              </a:lnSpc>
+              <a:spcAft>
+                <a:spcPts val="1000"/>
+              </a:spcAft>
+              <a:defRPr sz="2000" b="0">
+                <a:solidFill>
+                  <a:srgbClr val="333333"/>
+                </a:solidFill>
+                <a:latin typeface="Calibri"/>
+              </a:defRPr>
+            </a:pPr>
+            <a:r>
+              <a:t>• Compare `observed_addr` and `observed_data`</a:t>
+            </a:r>
+          </a:p>
+          <a:p>
+            <a:pPr>
+              <a:lnSpc>
+                <a:spcPts val="2200"/>
+              </a:lnSpc>
+              <a:spcAft>
+                <a:spcPts val="1000"/>
+              </a:spcAft>
+              <a:defRPr sz="2000" b="0">
+                <a:solidFill>
+                  <a:srgbClr val="333333"/>
+                </a:solidFill>
+                <a:latin typeface="Calibri"/>
+              </a:defRPr>
+            </a:pPr>
+            <a:r>
+              <a:t>      separately from one transaction.</a:t>
+            </a:r>
+          </a:p>
+        </p:txBody>
+      </p:sp>
+      <p:sp>
+        <p:nvSpPr>
+          <p:cNvPr id="4" name="TextBox 3"/>
+          <p:cNvSpPr txBox="1"/>
+          <p:nvPr/>
+        </p:nvSpPr>
+        <p:spPr>
+          <a:xfrm>
+            <a:off x="548640" y="6355080"/>
+            <a:ext cx="11064240" cy="320040"/>
+          </a:xfrm>
+          <a:prstGeom prst="rect">
+            <a:avLst/>
+          </a:prstGeom>
+          <a:noFill/>
+        </p:spPr>
+        <p:txBody>
+          <a:bodyPr wrap="square">
+            <a:noAutofit/>
+          </a:bodyPr>
+          <a:lstStyle/>
+          <a:p>
+            <a:pPr algn="r">
+              <a:lnSpc>
+                <a:spcPts val="2200"/>
+              </a:lnSpc>
+              <a:defRPr sz="1000" b="0">
+                <a:solidFill>
+                  <a:srgbClr val="666666"/>
+                </a:solidFill>
+                <a:latin typeface="Calibri"/>
+              </a:defRPr>
+            </a:pPr>
+            <a:r>
+              <a:t>learn_uart_spi_i2c / Module 8</a:t>
+            </a:r>
+          </a:p>
+        </p:txBody>
+      </p:sp>
+    </p:spTree>
+  </p:cSld>
+  <p:clrMapOvr>
+    <a:masterClrMapping/>
+  </p:clrMapOvr>
+</p:sld>
+</file>
+
+<file path=ppt/slides/slide34.xml><?xml version="1.0" encoding="utf-8"?>
+<p:sld xmlns:a="http://schemas.openxmlformats.org/drawingml/2006/main" xmlns:p="http://schemas.openxmlformats.org/presentationml/2006/main" xmlns:r="http://schemas.openxmlformats.org/officeDocument/2006/relationships">
+  <p:cSld>
+    <p:spTree>
+      <p:nvGrpSpPr>
+        <p:cNvPr id="1" name=""/>
+        <p:cNvGrpSpPr/>
+        <p:nvPr/>
+      </p:nvGrpSpPr>
+      <p:grpSpPr/>
+      <p:sp>
+        <p:nvSpPr>
+          <p:cNvPr id="2" name="TextBox 1"/>
+          <p:cNvSpPr txBox="1"/>
+          <p:nvPr/>
+        </p:nvSpPr>
+        <p:spPr>
+          <a:xfrm>
+            <a:off x="548640" y="411480"/>
+            <a:ext cx="11064240" cy="777240"/>
+          </a:xfrm>
+          <a:prstGeom prst="rect">
+            <a:avLst/>
+          </a:prstGeom>
+          <a:noFill/>
+        </p:spPr>
+        <p:txBody>
+          <a:bodyPr wrap="square">
+            <a:noAutofit/>
+          </a:bodyPr>
+          <a:lstStyle/>
+          <a:p>
+            <a:pPr>
+              <a:lnSpc>
+                <a:spcPts val="2200"/>
+              </a:lnSpc>
+              <a:defRPr sz="2800" b="1">
+                <a:solidFill>
+                  <a:srgbClr val="1A1A2E"/>
+                </a:solidFill>
+                <a:latin typeface="Calibri"/>
+              </a:defRPr>
+            </a:pPr>
+            <a:r>
+              <a:t>2. Course capstone</a:t>
+            </a:r>
+          </a:p>
+        </p:txBody>
+      </p:sp>
+      <p:sp>
+        <p:nvSpPr>
+          <p:cNvPr id="3" name="TextBox 2"/>
+          <p:cNvSpPr txBox="1"/>
+          <p:nvPr/>
+        </p:nvSpPr>
+        <p:spPr>
+          <a:xfrm>
+            <a:off x="548640" y="1234440"/>
+            <a:ext cx="11064240" cy="4937760"/>
+          </a:xfrm>
+          <a:prstGeom prst="rect">
+            <a:avLst/>
+          </a:prstGeom>
+          <a:noFill/>
+        </p:spPr>
+        <p:txBody>
+          <a:bodyPr wrap="square">
+            <a:noAutofit/>
+          </a:bodyPr>
+          <a:lstStyle/>
+          <a:p>
+            <a:pPr>
+              <a:lnSpc>
+                <a:spcPts val="2200"/>
+              </a:lnSpc>
+              <a:spcAft>
+                <a:spcPts val="1000"/>
+              </a:spcAft>
+              <a:defRPr sz="2000" b="0">
+                <a:solidFill>
+                  <a:srgbClr val="333333"/>
+                </a:solidFill>
+                <a:latin typeface="Calibri"/>
+              </a:defRPr>
+            </a:pPr>
+            <a:r>
+              <a:t>• Same UVM skeleton as UART/SPI; only monitor protocol</a:t>
+            </a:r>
+          </a:p>
+          <a:p>
+            <a:pPr>
+              <a:lnSpc>
+                <a:spcPts val="2200"/>
+              </a:lnSpc>
+              <a:spcAft>
+                <a:spcPts val="1000"/>
+              </a:spcAft>
+              <a:defRPr sz="2000" b="0">
+                <a:solidFill>
+                  <a:srgbClr val="333333"/>
+                </a:solidFill>
+                <a:latin typeface="Calibri"/>
+              </a:defRPr>
+            </a:pPr>
+            <a:r>
+              <a:t>      rules differ.</a:t>
+            </a:r>
+          </a:p>
+        </p:txBody>
+      </p:sp>
+      <p:sp>
+        <p:nvSpPr>
+          <p:cNvPr id="4" name="TextBox 3"/>
+          <p:cNvSpPr txBox="1"/>
+          <p:nvPr/>
+        </p:nvSpPr>
+        <p:spPr>
+          <a:xfrm>
+            <a:off x="548640" y="6355080"/>
+            <a:ext cx="11064240" cy="320040"/>
+          </a:xfrm>
+          <a:prstGeom prst="rect">
+            <a:avLst/>
+          </a:prstGeom>
+          <a:noFill/>
+        </p:spPr>
+        <p:txBody>
+          <a:bodyPr wrap="square">
+            <a:noAutofit/>
+          </a:bodyPr>
+          <a:lstStyle/>
+          <a:p>
+            <a:pPr algn="r">
+              <a:lnSpc>
+                <a:spcPts val="2200"/>
+              </a:lnSpc>
+              <a:defRPr sz="1000" b="0">
+                <a:solidFill>
+                  <a:srgbClr val="666666"/>
+                </a:solidFill>
+                <a:latin typeface="Calibri"/>
+              </a:defRPr>
+            </a:pPr>
+            <a:r>
+              <a:t>learn_uart_spi_i2c / Module 8</a:t>
+            </a:r>
+          </a:p>
+        </p:txBody>
+      </p:sp>
+    </p:spTree>
+  </p:cSld>
+  <p:clrMapOvr>
+    <a:masterClrMapping/>
+  </p:clrMapOvr>
+</p:sld>
+</file>
+
+<file path=ppt/slides/slide35.xml><?xml version="1.0" encoding="utf-8"?>
+<p:sld xmlns:a="http://schemas.openxmlformats.org/drawingml/2006/main" xmlns:p="http://schemas.openxmlformats.org/presentationml/2006/main" xmlns:r="http://schemas.openxmlformats.org/officeDocument/2006/relationships">
+  <p:cSld>
+    <p:spTree>
+      <p:nvGrpSpPr>
+        <p:cNvPr id="1" name=""/>
+        <p:cNvGrpSpPr/>
+        <p:nvPr/>
+      </p:nvGrpSpPr>
+      <p:grpSpPr/>
+      <p:sp>
+        <p:nvSpPr>
+          <p:cNvPr id="2" name="TextBox 1"/>
+          <p:cNvSpPr txBox="1"/>
+          <p:nvPr/>
+        </p:nvSpPr>
+        <p:spPr>
+          <a:xfrm>
+            <a:off x="548640" y="2743200"/>
+            <a:ext cx="11064240" cy="1371600"/>
+          </a:xfrm>
+          <a:prstGeom prst="rect">
+            <a:avLst/>
+          </a:prstGeom>
+          <a:noFill/>
+        </p:spPr>
+        <p:txBody>
+          <a:bodyPr wrap="square">
+            <a:noAutofit/>
+          </a:bodyPr>
+          <a:lstStyle/>
+          <a:p>
+            <a:pPr algn="ctr">
+              <a:lnSpc>
+                <a:spcPts val="2200"/>
+              </a:lnSpc>
+              <a:defRPr sz="3600" b="1">
+                <a:solidFill>
+                  <a:srgbClr val="1A1A2E"/>
+                </a:solidFill>
+                <a:latin typeface="Calibri"/>
+              </a:defRPr>
+            </a:pPr>
+            <a:r>
+              <a:t>Common pitfalls</a:t>
+            </a:r>
+          </a:p>
+        </p:txBody>
+      </p:sp>
+      <p:sp>
+        <p:nvSpPr>
+          <p:cNvPr id="3" name="TextBox 2"/>
+          <p:cNvSpPr txBox="1"/>
+          <p:nvPr/>
+        </p:nvSpPr>
+        <p:spPr>
+          <a:xfrm>
+            <a:off x="548640" y="6355080"/>
+            <a:ext cx="11064240" cy="320040"/>
+          </a:xfrm>
+          <a:prstGeom prst="rect">
+            <a:avLst/>
+          </a:prstGeom>
+          <a:noFill/>
+        </p:spPr>
+        <p:txBody>
+          <a:bodyPr wrap="square">
+            <a:noAutofit/>
+          </a:bodyPr>
+          <a:lstStyle/>
+          <a:p>
+            <a:pPr algn="r">
+              <a:lnSpc>
+                <a:spcPts val="2200"/>
+              </a:lnSpc>
+              <a:defRPr sz="1000" b="0">
+                <a:solidFill>
+                  <a:srgbClr val="666666"/>
+                </a:solidFill>
+                <a:latin typeface="Calibri"/>
+              </a:defRPr>
+            </a:pPr>
+            <a:r>
+              <a:t>learn_uart_spi_i2c / Module 8</a:t>
+            </a:r>
+          </a:p>
+        </p:txBody>
+      </p:sp>
+    </p:spTree>
+  </p:cSld>
+  <p:clrMapOvr>
+    <a:masterClrMapping/>
+  </p:clrMapOvr>
+</p:sld>
+</file>
+
+<file path=ppt/slides/slide36.xml><?xml version="1.0" encoding="utf-8"?>
+<p:sld xmlns:a="http://schemas.openxmlformats.org/drawingml/2006/main" xmlns:p="http://schemas.openxmlformats.org/presentationml/2006/main" xmlns:r="http://schemas.openxmlformats.org/officeDocument/2006/relationships">
+  <p:cSld>
+    <p:spTree>
+      <p:nvGrpSpPr>
+        <p:cNvPr id="1" name=""/>
+        <p:cNvGrpSpPr/>
+        <p:nvPr/>
+      </p:nvGrpSpPr>
+      <p:grpSpPr/>
+      <p:sp>
+        <p:nvSpPr>
+          <p:cNvPr id="2" name="TextBox 1"/>
+          <p:cNvSpPr txBox="1"/>
+          <p:nvPr/>
+        </p:nvSpPr>
+        <p:spPr>
+          <a:xfrm>
+            <a:off x="548640" y="411480"/>
+            <a:ext cx="11064240" cy="777240"/>
+          </a:xfrm>
+          <a:prstGeom prst="rect">
+            <a:avLst/>
+          </a:prstGeom>
+          <a:noFill/>
+        </p:spPr>
+        <p:txBody>
+          <a:bodyPr wrap="square">
+            <a:noAutofit/>
+          </a:bodyPr>
+          <a:lstStyle/>
+          <a:p>
+            <a:pPr>
+              <a:lnSpc>
+                <a:spcPts val="2200"/>
+              </a:lnSpc>
+              <a:defRPr sz="2800" b="1">
+                <a:solidFill>
+                  <a:srgbClr val="1A1A2E"/>
+                </a:solidFill>
+                <a:latin typeface="Calibri"/>
+              </a:defRPr>
+            </a:pPr>
+            <a:r>
+              <a:t>Merging address and data checks</a:t>
+            </a:r>
+          </a:p>
+        </p:txBody>
+      </p:sp>
+      <p:sp>
+        <p:nvSpPr>
+          <p:cNvPr id="3" name="TextBox 2"/>
+          <p:cNvSpPr txBox="1"/>
+          <p:nvPr/>
+        </p:nvSpPr>
+        <p:spPr>
+          <a:xfrm>
+            <a:off x="548640" y="1234440"/>
+            <a:ext cx="11064240" cy="4937760"/>
+          </a:xfrm>
+          <a:prstGeom prst="rect">
+            <a:avLst/>
+          </a:prstGeom>
+          <a:noFill/>
+        </p:spPr>
+        <p:txBody>
+          <a:bodyPr wrap="square">
+            <a:noAutofit/>
+          </a:bodyPr>
+          <a:lstStyle/>
+          <a:p>
+            <a:pPr>
+              <a:lnSpc>
+                <a:spcPts val="2200"/>
+              </a:lnSpc>
+              <a:spcAft>
+                <a:spcPts val="1000"/>
+              </a:spcAft>
+              <a:defRPr sz="2000" b="0">
+                <a:solidFill>
+                  <a:srgbClr val="333333"/>
+                </a:solidFill>
+                <a:latin typeface="Calibri"/>
+              </a:defRPr>
+            </a:pPr>
+            <a:r>
+              <a:t>• Mistake: One expected byte for the whole</a:t>
+            </a:r>
+          </a:p>
+          <a:p>
+            <a:pPr>
+              <a:lnSpc>
+                <a:spcPts val="2200"/>
+              </a:lnSpc>
+              <a:spcAft>
+                <a:spcPts val="1000"/>
+              </a:spcAft>
+              <a:defRPr sz="2000" b="0">
+                <a:solidFill>
+                  <a:srgbClr val="333333"/>
+                </a:solidFill>
+                <a:latin typeface="Calibri"/>
+              </a:defRPr>
+            </a:pPr>
+            <a:r>
+              <a:t>      transaction.</a:t>
+            </a:r>
+          </a:p>
+          <a:p>
+            <a:pPr>
+              <a:lnSpc>
+                <a:spcPts val="2200"/>
+              </a:lnSpc>
+              <a:spcAft>
+                <a:spcPts val="1000"/>
+              </a:spcAft>
+              <a:defRPr sz="2000" b="0">
+                <a:solidFill>
+                  <a:srgbClr val="333333"/>
+                </a:solidFill>
+                <a:latin typeface="Calibri"/>
+              </a:defRPr>
+            </a:pPr>
+            <a:r>
+              <a:t>• Correct: Separate expected/observed for address+W</a:t>
+            </a:r>
+          </a:p>
+          <a:p>
+            <a:pPr>
+              <a:lnSpc>
+                <a:spcPts val="2200"/>
+              </a:lnSpc>
+              <a:spcAft>
+                <a:spcPts val="1000"/>
+              </a:spcAft>
+              <a:defRPr sz="2000" b="0">
+                <a:solidFill>
+                  <a:srgbClr val="333333"/>
+                </a:solidFill>
+                <a:latin typeface="Calibri"/>
+              </a:defRPr>
+            </a:pPr>
+            <a:r>
+              <a:t>      and data phases.</a:t>
+            </a:r>
+          </a:p>
+          <a:p>
+            <a:pPr>
+              <a:lnSpc>
+                <a:spcPts val="2200"/>
+              </a:lnSpc>
+              <a:spcAft>
+                <a:spcPts val="1000"/>
+              </a:spcAft>
+              <a:defRPr sz="2000" b="0">
+                <a:solidFill>
+                  <a:srgbClr val="333333"/>
+                </a:solidFill>
+                <a:latin typeface="Calibri"/>
+              </a:defRPr>
+            </a:pPr>
+            <a:r>
+              <a:t>• Why: Off-by-one bit in address can hide behind a</a:t>
+            </a:r>
+          </a:p>
+          <a:p>
+            <a:pPr>
+              <a:lnSpc>
+                <a:spcPts val="2200"/>
+              </a:lnSpc>
+              <a:spcAft>
+                <a:spcPts val="1000"/>
+              </a:spcAft>
+              <a:defRPr sz="2000" b="0">
+                <a:solidFill>
+                  <a:srgbClr val="333333"/>
+                </a:solidFill>
+                <a:latin typeface="Calibri"/>
+              </a:defRPr>
+            </a:pPr>
+            <a:r>
+              <a:t>      correct data byte.</a:t>
+            </a:r>
+          </a:p>
+        </p:txBody>
+      </p:sp>
+      <p:sp>
+        <p:nvSpPr>
+          <p:cNvPr id="4" name="TextBox 3"/>
+          <p:cNvSpPr txBox="1"/>
+          <p:nvPr/>
+        </p:nvSpPr>
+        <p:spPr>
+          <a:xfrm>
+            <a:off x="548640" y="6355080"/>
+            <a:ext cx="11064240" cy="320040"/>
+          </a:xfrm>
+          <a:prstGeom prst="rect">
+            <a:avLst/>
+          </a:prstGeom>
+          <a:noFill/>
+        </p:spPr>
+        <p:txBody>
+          <a:bodyPr wrap="square">
+            <a:noAutofit/>
+          </a:bodyPr>
+          <a:lstStyle/>
+          <a:p>
+            <a:pPr algn="r">
+              <a:lnSpc>
+                <a:spcPts val="2200"/>
+              </a:lnSpc>
+              <a:defRPr sz="1000" b="0">
+                <a:solidFill>
+                  <a:srgbClr val="666666"/>
+                </a:solidFill>
+                <a:latin typeface="Calibri"/>
+              </a:defRPr>
+            </a:pPr>
+            <a:r>
+              <a:t>learn_uart_spi_i2c / Module 8</a:t>
+            </a:r>
+          </a:p>
+        </p:txBody>
+      </p:sp>
+    </p:spTree>
+  </p:cSld>
+  <p:clrMapOvr>
+    <a:masterClrMapping/>
+  </p:clrMapOvr>
+</p:sld>
+</file>
+
+<file path=ppt/slides/slide37.xml><?xml version="1.0" encoding="utf-8"?>
+<p:sld xmlns:a="http://schemas.openxmlformats.org/drawingml/2006/main" xmlns:p="http://schemas.openxmlformats.org/presentationml/2006/main" xmlns:r="http://schemas.openxmlformats.org/officeDocument/2006/relationships">
+  <p:cSld>
+    <p:spTree>
+      <p:nvGrpSpPr>
+        <p:cNvPr id="1" name=""/>
+        <p:cNvGrpSpPr/>
+        <p:nvPr/>
+      </p:nvGrpSpPr>
+      <p:grpSpPr/>
+      <p:sp>
+        <p:nvSpPr>
+          <p:cNvPr id="2" name="TextBox 1"/>
+          <p:cNvSpPr txBox="1"/>
+          <p:nvPr/>
+        </p:nvSpPr>
+        <p:spPr>
+          <a:xfrm>
+            <a:off x="548640" y="411480"/>
+            <a:ext cx="11064240" cy="777240"/>
+          </a:xfrm>
+          <a:prstGeom prst="rect">
+            <a:avLst/>
+          </a:prstGeom>
+          <a:noFill/>
+        </p:spPr>
+        <p:txBody>
+          <a:bodyPr wrap="square">
+            <a:noAutofit/>
+          </a:bodyPr>
+          <a:lstStyle/>
+          <a:p>
+            <a:pPr>
+              <a:lnSpc>
+                <a:spcPts val="2200"/>
+              </a:lnSpc>
+              <a:defRPr sz="2800" b="1">
+                <a:solidFill>
+                  <a:srgbClr val="1A1A2E"/>
+                </a:solidFill>
+                <a:latin typeface="Calibri"/>
+              </a:defRPr>
+            </a:pPr>
+            <a:r>
+              <a:t>Skipping baseline Module 7</a:t>
+            </a:r>
+          </a:p>
+        </p:txBody>
+      </p:sp>
+      <p:sp>
+        <p:nvSpPr>
+          <p:cNvPr id="3" name="TextBox 2"/>
+          <p:cNvSpPr txBox="1"/>
+          <p:nvPr/>
+        </p:nvSpPr>
+        <p:spPr>
+          <a:xfrm>
+            <a:off x="548640" y="1234440"/>
+            <a:ext cx="11064240" cy="4937760"/>
+          </a:xfrm>
+          <a:prstGeom prst="rect">
+            <a:avLst/>
+          </a:prstGeom>
+          <a:noFill/>
+        </p:spPr>
+        <p:txBody>
+          <a:bodyPr wrap="square">
+            <a:noAutofit/>
+          </a:bodyPr>
+          <a:lstStyle/>
+          <a:p>
+            <a:pPr>
+              <a:lnSpc>
+                <a:spcPts val="2200"/>
+              </a:lnSpc>
+              <a:spcAft>
+                <a:spcPts val="1000"/>
+              </a:spcAft>
+              <a:defRPr sz="2000" b="0">
+                <a:solidFill>
+                  <a:srgbClr val="333333"/>
+                </a:solidFill>
+                <a:latin typeface="Calibri"/>
+              </a:defRPr>
+            </a:pPr>
+            <a:r>
+              <a:t>• Mistake: Jumping to UVM without understanding inline</a:t>
+            </a:r>
+          </a:p>
+          <a:p>
+            <a:pPr>
+              <a:lnSpc>
+                <a:spcPts val="2200"/>
+              </a:lnSpc>
+              <a:spcAft>
+                <a:spcPts val="1000"/>
+              </a:spcAft>
+              <a:defRPr sz="2000" b="0">
+                <a:solidFill>
+                  <a:srgbClr val="333333"/>
+                </a:solidFill>
+                <a:latin typeface="Calibri"/>
+              </a:defRPr>
+            </a:pPr>
+            <a:r>
+              <a:t>      bus monitor logic.</a:t>
+            </a:r>
+          </a:p>
+          <a:p>
+            <a:pPr>
+              <a:lnSpc>
+                <a:spcPts val="2200"/>
+              </a:lnSpc>
+              <a:spcAft>
+                <a:spcPts val="1000"/>
+              </a:spcAft>
+              <a:defRPr sz="2000" b="0">
+                <a:solidFill>
+                  <a:srgbClr val="333333"/>
+                </a:solidFill>
+                <a:latin typeface="Calibri"/>
+              </a:defRPr>
+            </a:pPr>
+            <a:r>
+              <a:t>• Correct: Run i2c_baseline first; then map monitor to</a:t>
+            </a:r>
+          </a:p>
+          <a:p>
+            <a:pPr>
+              <a:lnSpc>
+                <a:spcPts val="2200"/>
+              </a:lnSpc>
+              <a:spcAft>
+                <a:spcPts val="1000"/>
+              </a:spcAft>
+              <a:defRPr sz="2000" b="0">
+                <a:solidFill>
+                  <a:srgbClr val="333333"/>
+                </a:solidFill>
+                <a:latin typeface="Calibri"/>
+              </a:defRPr>
+            </a:pPr>
+            <a:r>
+              <a:t>      I2cMonitor.</a:t>
+            </a:r>
+          </a:p>
+          <a:p>
+            <a:pPr>
+              <a:lnSpc>
+                <a:spcPts val="2200"/>
+              </a:lnSpc>
+              <a:spcAft>
+                <a:spcPts val="1000"/>
+              </a:spcAft>
+              <a:defRPr sz="2000" b="0">
+                <a:solidFill>
+                  <a:srgbClr val="333333"/>
+                </a:solidFill>
+                <a:latin typeface="Calibri"/>
+              </a:defRPr>
+            </a:pPr>
+            <a:r>
+              <a:t>• Why: UVM monitor is the same idea in a reusable</a:t>
+            </a:r>
+          </a:p>
+          <a:p>
+            <a:pPr>
+              <a:lnSpc>
+                <a:spcPts val="2200"/>
+              </a:lnSpc>
+              <a:spcAft>
+                <a:spcPts val="1000"/>
+              </a:spcAft>
+              <a:defRPr sz="2000" b="0">
+                <a:solidFill>
+                  <a:srgbClr val="333333"/>
+                </a:solidFill>
+                <a:latin typeface="Calibri"/>
+              </a:defRPr>
+            </a:pPr>
+            <a:r>
+              <a:t>      component.</a:t>
+            </a:r>
+          </a:p>
+        </p:txBody>
+      </p:sp>
+      <p:sp>
+        <p:nvSpPr>
+          <p:cNvPr id="4" name="TextBox 3"/>
+          <p:cNvSpPr txBox="1"/>
+          <p:nvPr/>
+        </p:nvSpPr>
+        <p:spPr>
+          <a:xfrm>
+            <a:off x="548640" y="6355080"/>
+            <a:ext cx="11064240" cy="320040"/>
+          </a:xfrm>
+          <a:prstGeom prst="rect">
+            <a:avLst/>
+          </a:prstGeom>
+          <a:noFill/>
+        </p:spPr>
+        <p:txBody>
+          <a:bodyPr wrap="square">
+            <a:noAutofit/>
+          </a:bodyPr>
+          <a:lstStyle/>
+          <a:p>
+            <a:pPr algn="r">
+              <a:lnSpc>
+                <a:spcPts val="2200"/>
+              </a:lnSpc>
+              <a:defRPr sz="1000" b="0">
+                <a:solidFill>
+                  <a:srgbClr val="666666"/>
+                </a:solidFill>
+                <a:latin typeface="Calibri"/>
+              </a:defRPr>
+            </a:pPr>
+            <a:r>
+              <a:t>learn_uart_spi_i2c / Module 8</a:t>
+            </a:r>
+          </a:p>
+        </p:txBody>
+      </p:sp>
+    </p:spTree>
+  </p:cSld>
+  <p:clrMapOvr>
+    <a:masterClrMapping/>
+  </p:clrMapOvr>
+</p:sld>
+</file>
+
+<file path=ppt/slides/slide38.xml><?xml version="1.0" encoding="utf-8"?>
+<p:sld xmlns:a="http://schemas.openxmlformats.org/drawingml/2006/main" xmlns:p="http://schemas.openxmlformats.org/presentationml/2006/main" xmlns:r="http://schemas.openxmlformats.org/officeDocument/2006/relationships">
+  <p:cSld>
+    <p:spTree>
+      <p:nvGrpSpPr>
+        <p:cNvPr id="1" name=""/>
+        <p:cNvGrpSpPr/>
+        <p:nvPr/>
+      </p:nvGrpSpPr>
+      <p:grpSpPr/>
+      <p:sp>
+        <p:nvSpPr>
+          <p:cNvPr id="2" name="TextBox 1"/>
+          <p:cNvSpPr txBox="1"/>
+          <p:nvPr/>
+        </p:nvSpPr>
+        <p:spPr>
+          <a:xfrm>
+            <a:off x="548640" y="2743200"/>
+            <a:ext cx="11064240" cy="1371600"/>
+          </a:xfrm>
+          <a:prstGeom prst="rect">
+            <a:avLst/>
+          </a:prstGeom>
+          <a:noFill/>
+        </p:spPr>
+        <p:txBody>
+          <a:bodyPr wrap="square">
+            <a:noAutofit/>
+          </a:bodyPr>
+          <a:lstStyle/>
+          <a:p>
+            <a:pPr algn="ctr">
+              <a:lnSpc>
+                <a:spcPts val="2200"/>
+              </a:lnSpc>
+              <a:defRPr sz="3600" b="1">
+                <a:solidFill>
+                  <a:srgbClr val="1A1A2E"/>
+                </a:solidFill>
+                <a:latin typeface="Calibri"/>
+              </a:defRPr>
+            </a:pPr>
+            <a:r>
+              <a:t>Practice &amp; assessment</a:t>
+            </a:r>
+          </a:p>
+        </p:txBody>
+      </p:sp>
+      <p:sp>
+        <p:nvSpPr>
+          <p:cNvPr id="3" name="TextBox 2"/>
+          <p:cNvSpPr txBox="1"/>
+          <p:nvPr/>
+        </p:nvSpPr>
+        <p:spPr>
+          <a:xfrm>
+            <a:off x="548640" y="6355080"/>
+            <a:ext cx="11064240" cy="320040"/>
+          </a:xfrm>
+          <a:prstGeom prst="rect">
+            <a:avLst/>
+          </a:prstGeom>
+          <a:noFill/>
+        </p:spPr>
+        <p:txBody>
+          <a:bodyPr wrap="square">
+            <a:noAutofit/>
+          </a:bodyPr>
+          <a:lstStyle/>
+          <a:p>
+            <a:pPr algn="r">
+              <a:lnSpc>
+                <a:spcPts val="2200"/>
+              </a:lnSpc>
+              <a:defRPr sz="1000" b="0">
+                <a:solidFill>
+                  <a:srgbClr val="666666"/>
+                </a:solidFill>
+                <a:latin typeface="Calibri"/>
+              </a:defRPr>
+            </a:pPr>
+            <a:r>
+              <a:t>learn_uart_spi_i2c / Module 8</a:t>
+            </a:r>
+          </a:p>
+        </p:txBody>
+      </p:sp>
+    </p:spTree>
+  </p:cSld>
+  <p:clrMapOvr>
+    <a:masterClrMapping/>
+  </p:clrMapOvr>
+</p:sld>
+</file>
+
+<file path=ppt/slides/slide39.xml><?xml version="1.0" encoding="utf-8"?>
+<p:sld xmlns:a="http://schemas.openxmlformats.org/drawingml/2006/main" xmlns:p="http://schemas.openxmlformats.org/presentationml/2006/main" xmlns:r="http://schemas.openxmlformats.org/officeDocument/2006/relationships">
+  <p:cSld>
+    <p:spTree>
+      <p:nvGrpSpPr>
+        <p:cNvPr id="1" name=""/>
+        <p:cNvGrpSpPr/>
+        <p:nvPr/>
+      </p:nvGrpSpPr>
+      <p:grpSpPr/>
+      <p:sp>
+        <p:nvSpPr>
+          <p:cNvPr id="2" name="TextBox 1"/>
+          <p:cNvSpPr txBox="1"/>
+          <p:nvPr/>
+        </p:nvSpPr>
+        <p:spPr>
+          <a:xfrm>
+            <a:off x="548640" y="411480"/>
+            <a:ext cx="11064240" cy="777240"/>
+          </a:xfrm>
+          <a:prstGeom prst="rect">
+            <a:avLst/>
+          </a:prstGeom>
+          <a:noFill/>
+        </p:spPr>
+        <p:txBody>
+          <a:bodyPr wrap="square">
+            <a:noAutofit/>
+          </a:bodyPr>
+          <a:lstStyle/>
+          <a:p>
+            <a:pPr>
+              <a:lnSpc>
+                <a:spcPts val="2200"/>
+              </a:lnSpc>
+              <a:defRPr sz="2800" b="1">
+                <a:solidFill>
+                  <a:srgbClr val="1A1A2E"/>
+                </a:solidFill>
+                <a:latin typeface="Calibri"/>
+              </a:defRPr>
+            </a:pPr>
+            <a:r>
+              <a:t>What you should know</a:t>
+            </a:r>
+          </a:p>
+        </p:txBody>
+      </p:sp>
+      <p:sp>
+        <p:nvSpPr>
+          <p:cNvPr id="3" name="TextBox 2"/>
+          <p:cNvSpPr txBox="1"/>
+          <p:nvPr/>
+        </p:nvSpPr>
+        <p:spPr>
+          <a:xfrm>
+            <a:off x="548640" y="1234440"/>
+            <a:ext cx="11064240" cy="4937760"/>
+          </a:xfrm>
+          <a:prstGeom prst="rect">
+            <a:avLst/>
+          </a:prstGeom>
+          <a:noFill/>
+        </p:spPr>
+        <p:txBody>
+          <a:bodyPr wrap="square">
+            <a:noAutofit/>
+          </a:bodyPr>
+          <a:lstStyle/>
+          <a:p>
+            <a:pPr>
+              <a:lnSpc>
+                <a:spcPts val="2200"/>
+              </a:lnSpc>
+              <a:spcAft>
+                <a:spcPts val="1000"/>
+              </a:spcAft>
+              <a:defRPr sz="2000" b="0">
+                <a:solidFill>
+                  <a:srgbClr val="333333"/>
+                </a:solidFill>
+                <a:latin typeface="Calibri"/>
+              </a:defRPr>
+            </a:pPr>
+            <a:r>
+              <a:t>• Describe the I²C UVM agent and how I2cMonitor maps</a:t>
+            </a:r>
+          </a:p>
+          <a:p>
+            <a:pPr>
+              <a:lnSpc>
+                <a:spcPts val="2200"/>
+              </a:lnSpc>
+              <a:spcAft>
+                <a:spcPts val="1000"/>
+              </a:spcAft>
+              <a:defRPr sz="2000" b="0">
+                <a:solidFill>
+                  <a:srgbClr val="333333"/>
+                </a:solidFill>
+                <a:latin typeface="Calibri"/>
+              </a:defRPr>
+            </a:pPr>
+            <a:r>
+              <a:t>      to SCL/SDA behavior.</a:t>
+            </a:r>
+          </a:p>
+          <a:p>
+            <a:pPr>
+              <a:lnSpc>
+                <a:spcPts val="2200"/>
+              </a:lnSpc>
+              <a:spcAft>
+                <a:spcPts val="1000"/>
+              </a:spcAft>
+              <a:defRPr sz="2000" b="0">
+                <a:solidFill>
+                  <a:srgbClr val="333333"/>
+                </a:solidFill>
+                <a:latin typeface="Calibri"/>
+              </a:defRPr>
+            </a:pPr>
+            <a:r>
+              <a:t>• Explain two-phase scoreboard checking (address vs</a:t>
+            </a:r>
+          </a:p>
+          <a:p>
+            <a:pPr>
+              <a:lnSpc>
+                <a:spcPts val="2200"/>
+              </a:lnSpc>
+              <a:spcAft>
+                <a:spcPts val="1000"/>
+              </a:spcAft>
+              <a:defRPr sz="2000" b="0">
+                <a:solidFill>
+                  <a:srgbClr val="333333"/>
+                </a:solidFill>
+                <a:latin typeface="Calibri"/>
+              </a:defRPr>
+            </a:pPr>
+            <a:r>
+              <a:t>      data).</a:t>
+            </a:r>
+          </a:p>
+          <a:p>
+            <a:pPr>
+              <a:lnSpc>
+                <a:spcPts val="2200"/>
+              </a:lnSpc>
+              <a:spcAft>
+                <a:spcPts val="1000"/>
+              </a:spcAft>
+              <a:defRPr sz="2000" b="0">
+                <a:solidFill>
+                  <a:srgbClr val="333333"/>
+                </a:solidFill>
+                <a:latin typeface="Calibri"/>
+              </a:defRPr>
+            </a:pPr>
+            <a:r>
+              <a:t>• Run `i2c_uvm` and interpret UVM / scoreboard output.</a:t>
+            </a:r>
+          </a:p>
+          <a:p>
+            <a:pPr>
+              <a:lnSpc>
+                <a:spcPts val="2200"/>
+              </a:lnSpc>
+              <a:spcAft>
+                <a:spcPts val="1000"/>
+              </a:spcAft>
+              <a:defRPr sz="2000" b="0">
+                <a:solidFill>
+                  <a:srgbClr val="333333"/>
+                </a:solidFill>
+                <a:latin typeface="Calibri"/>
+              </a:defRPr>
+            </a:pPr>
+            <a:r>
+              <a:t>• Compare verification architecture across UART, SPI,</a:t>
+            </a:r>
+          </a:p>
+          <a:p>
+            <a:pPr>
+              <a:lnSpc>
+                <a:spcPts val="2200"/>
+              </a:lnSpc>
+              <a:spcAft>
+                <a:spcPts val="1000"/>
+              </a:spcAft>
+              <a:defRPr sz="2000" b="0">
+                <a:solidFill>
+                  <a:srgbClr val="333333"/>
+                </a:solidFill>
+                <a:latin typeface="Calibri"/>
+              </a:defRPr>
+            </a:pPr>
+            <a:r>
+              <a:t>      and I²C modules in this course.</a:t>
             </a:r>
           </a:p>
         </p:txBody>
@@ -8485,6 +11288,610 @@
 </p:sld>
 </file>
 
+<file path=ppt/slides/slide40.xml><?xml version="1.0" encoding="utf-8"?>
+<p:sld xmlns:a="http://schemas.openxmlformats.org/drawingml/2006/main" xmlns:p="http://schemas.openxmlformats.org/presentationml/2006/main" xmlns:r="http://schemas.openxmlformats.org/officeDocument/2006/relationships">
+  <p:cSld>
+    <p:spTree>
+      <p:nvGrpSpPr>
+        <p:cNvPr id="1" name=""/>
+        <p:cNvGrpSpPr/>
+        <p:nvPr/>
+      </p:nvGrpSpPr>
+      <p:grpSpPr/>
+      <p:sp>
+        <p:nvSpPr>
+          <p:cNvPr id="2" name="TextBox 1"/>
+          <p:cNvSpPr txBox="1"/>
+          <p:nvPr/>
+        </p:nvSpPr>
+        <p:spPr>
+          <a:xfrm>
+            <a:off x="548640" y="411480"/>
+            <a:ext cx="11064240" cy="777240"/>
+          </a:xfrm>
+          <a:prstGeom prst="rect">
+            <a:avLst/>
+          </a:prstGeom>
+          <a:noFill/>
+        </p:spPr>
+        <p:txBody>
+          <a:bodyPr wrap="square">
+            <a:noAutofit/>
+          </a:bodyPr>
+          <a:lstStyle/>
+          <a:p>
+            <a:pPr>
+              <a:lnSpc>
+                <a:spcPts val="2200"/>
+              </a:lnSpc>
+              <a:defRPr sz="2800" b="1">
+                <a:solidFill>
+                  <a:srgbClr val="1A1A2E"/>
+                </a:solidFill>
+                <a:latin typeface="Calibri"/>
+              </a:defRPr>
+            </a:pPr>
+            <a:r>
+              <a:t>Exercises</a:t>
+            </a:r>
+          </a:p>
+        </p:txBody>
+      </p:sp>
+      <p:sp>
+        <p:nvSpPr>
+          <p:cNvPr id="3" name="TextBox 2"/>
+          <p:cNvSpPr txBox="1"/>
+          <p:nvPr/>
+        </p:nvSpPr>
+        <p:spPr>
+          <a:xfrm>
+            <a:off x="548640" y="1234440"/>
+            <a:ext cx="11064240" cy="4937760"/>
+          </a:xfrm>
+          <a:prstGeom prst="rect">
+            <a:avLst/>
+          </a:prstGeom>
+          <a:noFill/>
+        </p:spPr>
+        <p:txBody>
+          <a:bodyPr wrap="square">
+            <a:noAutofit/>
+          </a:bodyPr>
+          <a:lstStyle/>
+          <a:p>
+            <a:pPr>
+              <a:lnSpc>
+                <a:spcPts val="2200"/>
+              </a:lnSpc>
+              <a:spcAft>
+                <a:spcPts val="1000"/>
+              </a:spcAft>
+              <a:defRPr sz="2000" b="0">
+                <a:solidFill>
+                  <a:srgbClr val="333333"/>
+                </a:solidFill>
+                <a:latin typeface="Calibri"/>
+              </a:defRPr>
+            </a:pPr>
+            <a:r>
+              <a:t>• Run i2c_uvm</a:t>
+            </a:r>
+          </a:p>
+          <a:p>
+            <a:pPr>
+              <a:lnSpc>
+                <a:spcPts val="2200"/>
+              </a:lnSpc>
+              <a:spcAft>
+                <a:spcPts val="1000"/>
+              </a:spcAft>
+              <a:defRPr sz="2000" b="0">
+                <a:solidFill>
+                  <a:srgbClr val="333333"/>
+                </a:solidFill>
+                <a:latin typeface="Calibri"/>
+              </a:defRPr>
+            </a:pPr>
+            <a:r>
+              <a:t>• Trace one transaction</a:t>
+            </a:r>
+          </a:p>
+          <a:p>
+            <a:pPr>
+              <a:lnSpc>
+                <a:spcPts val="2200"/>
+              </a:lnSpc>
+              <a:spcAft>
+                <a:spcPts val="1000"/>
+              </a:spcAft>
+              <a:defRPr sz="2000" b="0">
+                <a:solidFill>
+                  <a:srgbClr val="333333"/>
+                </a:solidFill>
+                <a:latin typeface="Calibri"/>
+              </a:defRPr>
+            </a:pPr>
+            <a:r>
+              <a:t>• Change the sequence</a:t>
+            </a:r>
+          </a:p>
+          <a:p>
+            <a:pPr>
+              <a:lnSpc>
+                <a:spcPts val="2200"/>
+              </a:lnSpc>
+              <a:spcAft>
+                <a:spcPts val="1000"/>
+              </a:spcAft>
+              <a:defRPr sz="2000" b="0">
+                <a:solidFill>
+                  <a:srgbClr val="333333"/>
+                </a:solidFill>
+                <a:latin typeface="Calibri"/>
+              </a:defRPr>
+            </a:pPr>
+            <a:r>
+              <a:t>• Compare across protocols</a:t>
+            </a:r>
+          </a:p>
+        </p:txBody>
+      </p:sp>
+      <p:sp>
+        <p:nvSpPr>
+          <p:cNvPr id="4" name="TextBox 3"/>
+          <p:cNvSpPr txBox="1"/>
+          <p:nvPr/>
+        </p:nvSpPr>
+        <p:spPr>
+          <a:xfrm>
+            <a:off x="548640" y="6355080"/>
+            <a:ext cx="11064240" cy="320040"/>
+          </a:xfrm>
+          <a:prstGeom prst="rect">
+            <a:avLst/>
+          </a:prstGeom>
+          <a:noFill/>
+        </p:spPr>
+        <p:txBody>
+          <a:bodyPr wrap="square">
+            <a:noAutofit/>
+          </a:bodyPr>
+          <a:lstStyle/>
+          <a:p>
+            <a:pPr algn="r">
+              <a:lnSpc>
+                <a:spcPts val="2200"/>
+              </a:lnSpc>
+              <a:defRPr sz="1000" b="0">
+                <a:solidFill>
+                  <a:srgbClr val="666666"/>
+                </a:solidFill>
+                <a:latin typeface="Calibri"/>
+              </a:defRPr>
+            </a:pPr>
+            <a:r>
+              <a:t>learn_uart_spi_i2c / Module 8</a:t>
+            </a:r>
+          </a:p>
+        </p:txBody>
+      </p:sp>
+    </p:spTree>
+  </p:cSld>
+  <p:clrMapOvr>
+    <a:masterClrMapping/>
+  </p:clrMapOvr>
+</p:sld>
+</file>
+
+<file path=ppt/slides/slide41.xml><?xml version="1.0" encoding="utf-8"?>
+<p:sld xmlns:a="http://schemas.openxmlformats.org/drawingml/2006/main" xmlns:p="http://schemas.openxmlformats.org/presentationml/2006/main" xmlns:r="http://schemas.openxmlformats.org/officeDocument/2006/relationships">
+  <p:cSld>
+    <p:spTree>
+      <p:nvGrpSpPr>
+        <p:cNvPr id="1" name=""/>
+        <p:cNvGrpSpPr/>
+        <p:nvPr/>
+      </p:nvGrpSpPr>
+      <p:grpSpPr/>
+      <p:sp>
+        <p:nvSpPr>
+          <p:cNvPr id="2" name="TextBox 1"/>
+          <p:cNvSpPr txBox="1"/>
+          <p:nvPr/>
+        </p:nvSpPr>
+        <p:spPr>
+          <a:xfrm>
+            <a:off x="548640" y="411480"/>
+            <a:ext cx="11064240" cy="777240"/>
+          </a:xfrm>
+          <a:prstGeom prst="rect">
+            <a:avLst/>
+          </a:prstGeom>
+          <a:noFill/>
+        </p:spPr>
+        <p:txBody>
+          <a:bodyPr wrap="square">
+            <a:noAutofit/>
+          </a:bodyPr>
+          <a:lstStyle/>
+          <a:p>
+            <a:pPr>
+              <a:lnSpc>
+                <a:spcPts val="2200"/>
+              </a:lnSpc>
+              <a:defRPr sz="2800" b="1">
+                <a:solidFill>
+                  <a:srgbClr val="1A1A2E"/>
+                </a:solidFill>
+                <a:latin typeface="Calibri"/>
+              </a:defRPr>
+            </a:pPr>
+            <a:r>
+              <a:t>Assessment checklist</a:t>
+            </a:r>
+          </a:p>
+        </p:txBody>
+      </p:sp>
+      <p:sp>
+        <p:nvSpPr>
+          <p:cNvPr id="3" name="TextBox 2"/>
+          <p:cNvSpPr txBox="1"/>
+          <p:nvPr/>
+        </p:nvSpPr>
+        <p:spPr>
+          <a:xfrm>
+            <a:off x="548640" y="1234440"/>
+            <a:ext cx="11064240" cy="4937760"/>
+          </a:xfrm>
+          <a:prstGeom prst="rect">
+            <a:avLst/>
+          </a:prstGeom>
+          <a:noFill/>
+        </p:spPr>
+        <p:txBody>
+          <a:bodyPr wrap="square">
+            <a:noAutofit/>
+          </a:bodyPr>
+          <a:lstStyle/>
+          <a:p>
+            <a:pPr>
+              <a:lnSpc>
+                <a:spcPts val="2200"/>
+              </a:lnSpc>
+              <a:spcAft>
+                <a:spcPts val="1000"/>
+              </a:spcAft>
+              <a:defRPr sz="2000" b="0">
+                <a:solidFill>
+                  <a:srgbClr val="333333"/>
+                </a:solidFill>
+                <a:latin typeface="Calibri"/>
+              </a:defRPr>
+            </a:pPr>
+            <a:r>
+              <a:t>• Can describe the I²C UVM agent and how it maps to</a:t>
+            </a:r>
+          </a:p>
+          <a:p>
+            <a:pPr>
+              <a:lnSpc>
+                <a:spcPts val="2200"/>
+              </a:lnSpc>
+              <a:spcAft>
+                <a:spcPts val="1000"/>
+              </a:spcAft>
+              <a:defRPr sz="2000" b="0">
+                <a:solidFill>
+                  <a:srgbClr val="333333"/>
+                </a:solidFill>
+                <a:latin typeface="Calibri"/>
+              </a:defRPr>
+            </a:pPr>
+            <a:r>
+              <a:t>      I²C (addr+data, monitor on SCL/SDA).</a:t>
+            </a:r>
+          </a:p>
+          <a:p>
+            <a:pPr>
+              <a:lnSpc>
+                <a:spcPts val="2200"/>
+              </a:lnSpc>
+              <a:spcAft>
+                <a:spcPts val="1000"/>
+              </a:spcAft>
+              <a:defRPr sz="2000" b="0">
+                <a:solidFill>
+                  <a:srgbClr val="333333"/>
+                </a:solidFill>
+                <a:latin typeface="Calibri"/>
+              </a:defRPr>
+            </a:pPr>
+            <a:r>
+              <a:t>• Can run i2c_uvm and interpret UVM output.</a:t>
+            </a:r>
+          </a:p>
+          <a:p>
+            <a:pPr>
+              <a:lnSpc>
+                <a:spcPts val="2200"/>
+              </a:lnSpc>
+              <a:spcAft>
+                <a:spcPts val="1000"/>
+              </a:spcAft>
+              <a:defRPr sz="2000" b="0">
+                <a:solidFill>
+                  <a:srgbClr val="333333"/>
+                </a:solidFill>
+                <a:latin typeface="Calibri"/>
+              </a:defRPr>
+            </a:pPr>
+            <a:r>
+              <a:t>• Can compare UVM structure across UART, SPI, and I²C.</a:t>
+            </a:r>
+          </a:p>
+        </p:txBody>
+      </p:sp>
+      <p:sp>
+        <p:nvSpPr>
+          <p:cNvPr id="4" name="TextBox 3"/>
+          <p:cNvSpPr txBox="1"/>
+          <p:nvPr/>
+        </p:nvSpPr>
+        <p:spPr>
+          <a:xfrm>
+            <a:off x="548640" y="6355080"/>
+            <a:ext cx="11064240" cy="320040"/>
+          </a:xfrm>
+          <a:prstGeom prst="rect">
+            <a:avLst/>
+          </a:prstGeom>
+          <a:noFill/>
+        </p:spPr>
+        <p:txBody>
+          <a:bodyPr wrap="square">
+            <a:noAutofit/>
+          </a:bodyPr>
+          <a:lstStyle/>
+          <a:p>
+            <a:pPr algn="r">
+              <a:lnSpc>
+                <a:spcPts val="2200"/>
+              </a:lnSpc>
+              <a:defRPr sz="1000" b="0">
+                <a:solidFill>
+                  <a:srgbClr val="666666"/>
+                </a:solidFill>
+                <a:latin typeface="Calibri"/>
+              </a:defRPr>
+            </a:pPr>
+            <a:r>
+              <a:t>learn_uart_spi_i2c / Module 8</a:t>
+            </a:r>
+          </a:p>
+        </p:txBody>
+      </p:sp>
+    </p:spTree>
+  </p:cSld>
+  <p:clrMapOvr>
+    <a:masterClrMapping/>
+  </p:clrMapOvr>
+</p:sld>
+</file>
+
+<file path=ppt/slides/slide42.xml><?xml version="1.0" encoding="utf-8"?>
+<p:sld xmlns:a="http://schemas.openxmlformats.org/drawingml/2006/main" xmlns:p="http://schemas.openxmlformats.org/presentationml/2006/main" xmlns:r="http://schemas.openxmlformats.org/officeDocument/2006/relationships">
+  <p:cSld>
+    <p:spTree>
+      <p:nvGrpSpPr>
+        <p:cNvPr id="1" name=""/>
+        <p:cNvGrpSpPr/>
+        <p:nvPr/>
+      </p:nvGrpSpPr>
+      <p:grpSpPr/>
+      <p:sp>
+        <p:nvSpPr>
+          <p:cNvPr id="2" name="TextBox 1"/>
+          <p:cNvSpPr txBox="1"/>
+          <p:nvPr/>
+        </p:nvSpPr>
+        <p:spPr>
+          <a:xfrm>
+            <a:off x="548640" y="411480"/>
+            <a:ext cx="11064240" cy="777240"/>
+          </a:xfrm>
+          <a:prstGeom prst="rect">
+            <a:avLst/>
+          </a:prstGeom>
+          <a:noFill/>
+        </p:spPr>
+        <p:txBody>
+          <a:bodyPr wrap="square">
+            <a:noAutofit/>
+          </a:bodyPr>
+          <a:lstStyle/>
+          <a:p>
+            <a:pPr>
+              <a:lnSpc>
+                <a:spcPts val="2200"/>
+              </a:lnSpc>
+              <a:defRPr sz="2800" b="1">
+                <a:solidFill>
+                  <a:srgbClr val="1A1A2E"/>
+                </a:solidFill>
+                <a:latin typeface="Calibri"/>
+              </a:defRPr>
+            </a:pPr>
+            <a:r>
+              <a:t>Summary &amp; next steps</a:t>
+            </a:r>
+          </a:p>
+        </p:txBody>
+      </p:sp>
+      <p:sp>
+        <p:nvSpPr>
+          <p:cNvPr id="3" name="TextBox 2"/>
+          <p:cNvSpPr txBox="1"/>
+          <p:nvPr/>
+        </p:nvSpPr>
+        <p:spPr>
+          <a:xfrm>
+            <a:off x="548640" y="1234440"/>
+            <a:ext cx="11064240" cy="4937760"/>
+          </a:xfrm>
+          <a:prstGeom prst="rect">
+            <a:avLst/>
+          </a:prstGeom>
+          <a:noFill/>
+        </p:spPr>
+        <p:txBody>
+          <a:bodyPr wrap="square">
+            <a:noAutofit/>
+          </a:bodyPr>
+          <a:lstStyle/>
+          <a:p>
+            <a:pPr>
+              <a:lnSpc>
+                <a:spcPts val="2200"/>
+              </a:lnSpc>
+              <a:spcAft>
+                <a:spcPts val="1000"/>
+              </a:spcAft>
+              <a:defRPr sz="2000" b="0">
+                <a:solidFill>
+                  <a:srgbClr val="333333"/>
+                </a:solidFill>
+                <a:latin typeface="Calibri"/>
+              </a:defRPr>
+            </a:pPr>
+            <a:r>
+              <a:t>• Extend I²C verification to **UVM+SV** — I²C agent</a:t>
+            </a:r>
+          </a:p>
+          <a:p>
+            <a:pPr>
+              <a:lnSpc>
+                <a:spcPts val="2200"/>
+              </a:lnSpc>
+              <a:spcAft>
+                <a:spcPts val="1000"/>
+              </a:spcAft>
+              <a:defRPr sz="2000" b="0">
+                <a:solidFill>
+                  <a:srgbClr val="333333"/>
+                </a:solidFill>
+                <a:latin typeface="Calibri"/>
+              </a:defRPr>
+            </a:pPr>
+            <a:r>
+              <a:t>      (transaction, sequence, driver, monitor, scoreboa…</a:t>
+            </a:r>
+          </a:p>
+          <a:p>
+            <a:pPr>
+              <a:lnSpc>
+                <a:spcPts val="2200"/>
+              </a:lnSpc>
+              <a:spcAft>
+                <a:spcPts val="1000"/>
+              </a:spcAft>
+              <a:defRPr sz="2000" b="0">
+                <a:solidFill>
+                  <a:srgbClr val="333333"/>
+                </a:solidFill>
+                <a:latin typeface="Calibri"/>
+              </a:defRPr>
+            </a:pPr>
+            <a:r>
+              <a:t>• Complete module8/CHECKLIST.md</a:t>
+            </a:r>
+          </a:p>
+          <a:p>
+            <a:pPr>
+              <a:lnSpc>
+                <a:spcPts val="2200"/>
+              </a:lnSpc>
+              <a:spcAft>
+                <a:spcPts val="1000"/>
+              </a:spcAft>
+              <a:defRPr sz="2000" b="0">
+                <a:solidFill>
+                  <a:srgbClr val="333333"/>
+                </a:solidFill>
+                <a:latin typeface="Calibri"/>
+              </a:defRPr>
+            </a:pPr>
+            <a:r>
+              <a:t>• Review module8/EXAMPLES.md and run each lab</a:t>
+            </a:r>
+          </a:p>
+          <a:p>
+            <a:pPr>
+              <a:lnSpc>
+                <a:spcPts val="2200"/>
+              </a:lnSpc>
+              <a:spcAft>
+                <a:spcPts val="1000"/>
+              </a:spcAft>
+              <a:defRPr sz="2000" b="0">
+                <a:solidFill>
+                  <a:srgbClr val="333333"/>
+                </a:solidFill>
+                <a:latin typeface="Calibri"/>
+              </a:defRPr>
+            </a:pPr>
+            <a:r>
+              <a:t>• Next: Next module in course</a:t>
+            </a:r>
+          </a:p>
+        </p:txBody>
+      </p:sp>
+      <p:sp>
+        <p:nvSpPr>
+          <p:cNvPr id="4" name="TextBox 3"/>
+          <p:cNvSpPr txBox="1"/>
+          <p:nvPr/>
+        </p:nvSpPr>
+        <p:spPr>
+          <a:xfrm>
+            <a:off x="548640" y="6355080"/>
+            <a:ext cx="11064240" cy="320040"/>
+          </a:xfrm>
+          <a:prstGeom prst="rect">
+            <a:avLst/>
+          </a:prstGeom>
+          <a:noFill/>
+        </p:spPr>
+        <p:txBody>
+          <a:bodyPr wrap="square">
+            <a:noAutofit/>
+          </a:bodyPr>
+          <a:lstStyle/>
+          <a:p>
+            <a:pPr algn="r">
+              <a:lnSpc>
+                <a:spcPts val="2200"/>
+              </a:lnSpc>
+              <a:defRPr sz="1000" b="0">
+                <a:solidFill>
+                  <a:srgbClr val="666666"/>
+                </a:solidFill>
+                <a:latin typeface="Calibri"/>
+              </a:defRPr>
+            </a:pPr>
+            <a:r>
+              <a:t>learn_uart_spi_i2c / Module 8</a:t>
+            </a:r>
+          </a:p>
+        </p:txBody>
+      </p:sp>
+    </p:spTree>
+  </p:cSld>
+  <p:clrMapOvr>
+    <a:masterClrMapping/>
+  </p:clrMapOvr>
+</p:sld>
+</file>
+
 <file path=ppt/slides/slide5.xml><?xml version="1.0" encoding="utf-8"?>
 <p:sld xmlns:a="http://schemas.openxmlformats.org/drawingml/2006/main" xmlns:p="http://schemas.openxmlformats.org/presentationml/2006/main" xmlns:r="http://schemas.openxmlformats.org/officeDocument/2006/relationships">
   <p:cSld>
@@ -9111,14 +12518,113 @@
               </a:defRPr>
             </a:pPr>
             <a:r>
-              <a:t>RTL / block architecture</a:t>
+              <a:t>1. I²C DUT (reused from Module 7)</a:t>
+            </a:r>
+          </a:p>
+        </p:txBody>
+      </p:sp>
+      <p:sp>
+        <p:nvSpPr>
+          <p:cNvPr id="3" name="TextBox 2"/>
+          <p:cNvSpPr txBox="1"/>
+          <p:nvPr/>
+        </p:nvSpPr>
+        <p:spPr>
+          <a:xfrm>
+            <a:off x="548640" y="1234440"/>
+            <a:ext cx="5303520" cy="4754880"/>
+          </a:xfrm>
+          <a:prstGeom prst="rect">
+            <a:avLst/>
+          </a:prstGeom>
+          <a:noFill/>
+        </p:spPr>
+        <p:txBody>
+          <a:bodyPr wrap="square">
+            <a:noAutofit/>
+          </a:bodyPr>
+          <a:lstStyle/>
+          <a:p>
+            <a:pPr>
+              <a:lnSpc>
+                <a:spcPts val="2200"/>
+              </a:lnSpc>
+              <a:spcAft>
+                <a:spcPts val="1000"/>
+              </a:spcAft>
+              <a:defRPr sz="2000" b="0">
+                <a:solidFill>
+                  <a:srgbClr val="333333"/>
+                </a:solidFill>
+                <a:latin typeface="Calibri"/>
+              </a:defRPr>
+            </a:pPr>
+            <a:r>
+              <a:t>• i2c_master + clk_div; i2c_if for</a:t>
+            </a:r>
+          </a:p>
+          <a:p>
+            <a:pPr>
+              <a:lnSpc>
+                <a:spcPts val="2200"/>
+              </a:lnSpc>
+              <a:spcAft>
+                <a:spcPts val="1000"/>
+              </a:spcAft>
+              <a:defRPr sz="2000" b="0">
+                <a:solidFill>
+                  <a:srgbClr val="333333"/>
+                </a:solidFill>
+                <a:latin typeface="Calibri"/>
+              </a:defRPr>
+            </a:pPr>
+            <a:r>
+              <a:t>      UVM connection.</a:t>
+            </a:r>
+          </a:p>
+          <a:p>
+            <a:pPr>
+              <a:lnSpc>
+                <a:spcPts val="2200"/>
+              </a:lnSpc>
+              <a:spcAft>
+                <a:spcPts val="1000"/>
+              </a:spcAft>
+              <a:defRPr sz="2000" b="0">
+                <a:solidFill>
+                  <a:srgbClr val="333333"/>
+                </a:solidFill>
+                <a:latin typeface="Calibri"/>
+              </a:defRPr>
+            </a:pPr>
+            <a:r>
+              <a:t>• Wire sequence: START → address+W</a:t>
+            </a:r>
+          </a:p>
+          <a:p>
+            <a:pPr>
+              <a:lnSpc>
+                <a:spcPts val="2200"/>
+              </a:lnSpc>
+              <a:spcAft>
+                <a:spcPts val="1000"/>
+              </a:spcAft>
+              <a:defRPr sz="2000" b="0">
+                <a:solidFill>
+                  <a:srgbClr val="333333"/>
+                </a:solidFill>
+                <a:latin typeface="Calibri"/>
+              </a:defRPr>
+            </a:pPr>
+            <a:r>
+              <a:t>      → data → STOP.</a:t>
             </a:r>
           </a:p>
         </p:txBody>
       </p:sp>
       <p:pic>
         <p:nvPicPr>
-          <p:cNvPr id="3" name="Picture 2" descr="rtl_architecture.png"/>
+          <p:cNvPr id="4" name="Picture 3" descr="rtl_architecture.png"/>
           <p:cNvPicPr>
             <a:picLocks noChangeAspect="1"/>
           </p:cNvPicPr>
@@ -9132,53 +12638,14 @@
         </p:blipFill>
         <p:spPr>
           <a:xfrm>
-            <a:off x="548640" y="1143000"/>
-            <a:ext cx="8128000" cy="4572000"/>
+            <a:off x="6172200" y="2094547"/>
+            <a:ext cx="5394960" cy="3034665"/>
           </a:xfrm>
           <a:prstGeom prst="rect">
             <a:avLst/>
           </a:prstGeom>
         </p:spPr>
       </p:pic>
-      <p:sp>
-        <p:nvSpPr>
-          <p:cNvPr id="4" name="TextBox 3"/>
-          <p:cNvSpPr txBox="1"/>
-          <p:nvPr/>
-        </p:nvSpPr>
-        <p:spPr>
-          <a:xfrm>
-            <a:off x="548640" y="5897880"/>
-            <a:ext cx="11064240" cy="411480"/>
-          </a:xfrm>
-          <a:prstGeom prst="rect">
-            <a:avLst/>
-          </a:prstGeom>
-          <a:noFill/>
-        </p:spPr>
-        <p:txBody>
-          <a:bodyPr wrap="square">
-            <a:noAutofit/>
-          </a:bodyPr>
-          <a:lstStyle/>
-          <a:p>
-            <a:pPr>
-              <a:lnSpc>
-                <a:spcPts val="2200"/>
-              </a:lnSpc>
-              <a:defRPr sz="1200" b="0">
-                <a:solidFill>
-                  <a:srgbClr val="333333"/>
-                </a:solidFill>
-                <a:latin typeface="Calibri"/>
-              </a:defRPr>
-            </a:pPr>
-            <a:r>
-              <a:t>Module 8: DUT / block hierarchy (see module8/examples/).</a:t>
-            </a:r>
-          </a:p>
-        </p:txBody>
-      </p:sp>
       <p:sp>
         <p:nvSpPr>
           <p:cNvPr id="5" name="TextBox 4"/>
